--- a/talk/lab_meeting_2026-09.pptx
+++ b/talk/lab_meeting_2026-09.pptx
@@ -11,9 +11,11 @@
     <p:sldId id="259" r:id="rId5"/>
     <p:sldId id="260" r:id="rId6"/>
     <p:sldId id="261" r:id="rId7"/>
+    <p:sldId id="262" r:id="rId8"/>
+    <p:sldId id="263" r:id="rId9"/>
   </p:sldIdLst>
   <p:notesMasterIdLst>
-    <p:notesMasterId r:id="rId8"/>
+    <p:notesMasterId r:id="rId10"/>
   </p:notesMasterIdLst>
   <p:sldSz cx="12192000" cy="6858000"/>
   <p:notesSz cx="6858000" cy="12192000"/>
@@ -124,7 +126,7 @@
           <a:lstStyle/>
           <a:p>
             <a:pPr>
-              <a:defRPr sz="1500" b="0" i="0" u="none" strike="noStrike">
+              <a:defRPr sz="1600" b="0" i="0" u="none" strike="noStrike">
                 <a:solidFill>
                   <a:srgbClr val="003C6C"/>
                 </a:solidFill>
@@ -132,7 +134,7 @@
               </a:defRPr>
             </a:pPr>
             <a:r>
-              <a:rPr sz="1500" b="0" i="0" u="none" strike="noStrike">
+              <a:rPr sz="1600" b="0" i="0" u="none" strike="noStrike">
                 <a:solidFill>
                   <a:srgbClr val="003C6C"/>
                 </a:solidFill>
@@ -181,7 +183,7 @@
               <a:lstStyle/>
               <a:p>
                 <a:pPr>
-                  <a:defRPr b="0" i="0" strike="noStrike" sz="1200" u="none">
+                  <a:defRPr b="0" i="0" strike="noStrike" sz="1300" u="none">
                     <a:solidFill>
                       <a:srgbClr val="18293B"/>
                     </a:solidFill>
@@ -255,7 +257,7 @@
             <a:lstStyle/>
             <a:p>
               <a:pPr>
-                <a:defRPr b="0" i="0" strike="noStrike" sz="1200" u="none">
+                <a:defRPr b="0" i="0" strike="noStrike" sz="1300" u="none">
                   <a:solidFill>
                     <a:srgbClr val="18293B"/>
                   </a:solidFill>
@@ -303,7 +305,7 @@
           <a:lstStyle/>
           <a:p>
             <a:pPr>
-              <a:defRPr sz="1200" b="0" i="0" u="none" strike="noStrike">
+              <a:defRPr sz="1300" b="0" i="0" u="none" strike="noStrike">
                 <a:solidFill>
                   <a:srgbClr val="5B6B7C"/>
                 </a:solidFill>
@@ -358,7 +360,7 @@
           <a:lstStyle/>
           <a:p>
             <a:pPr>
-              <a:defRPr sz="1100" b="0" i="0" u="none" strike="noStrike">
+              <a:defRPr sz="1200" b="0" i="0" u="none" strike="noStrike">
                 <a:solidFill>
                   <a:srgbClr val="5B6B7C"/>
                 </a:solidFill>
@@ -408,7 +410,7 @@
           <a:lstStyle/>
           <a:p>
             <a:pPr>
-              <a:defRPr sz="1500" b="0" i="0" u="none" strike="noStrike">
+              <a:defRPr sz="1600" b="0" i="0" u="none" strike="noStrike">
                 <a:solidFill>
                   <a:srgbClr val="003C6C"/>
                 </a:solidFill>
@@ -416,13 +418,13 @@
               </a:defRPr>
             </a:pPr>
             <a:r>
-              <a:rPr sz="1500" b="0" i="0" u="none" strike="noStrike">
+              <a:rPr sz="1600" b="0" i="0" u="none" strike="noStrike">
                 <a:solidFill>
                   <a:srgbClr val="003C6C"/>
                 </a:solidFill>
                 <a:latin typeface="Calibri"/>
               </a:rPr>
-              <a:t>Concurrent 3.4 kb queries vs threads</a:t>
+              <a:t>Concurrent 3.4 kb queries / s vs threads</a:t>
             </a:r>
           </a:p>
         </c:rich>
@@ -470,7 +472,7 @@
               <a:lstStyle/>
               <a:p>
                 <a:pPr>
-                  <a:defRPr b="0" i="0" strike="noStrike" sz="1200" u="none">
+                  <a:defRPr b="0" i="0" strike="noStrike" sz="1300" u="none">
                     <a:solidFill>
                       <a:srgbClr val="18293B"/>
                     </a:solidFill>
@@ -569,7 +571,7 @@
             <a:lstStyle/>
             <a:p>
               <a:pPr>
-                <a:defRPr b="0" i="0" strike="noStrike" sz="1200" u="none">
+                <a:defRPr b="0" i="0" strike="noStrike" sz="1300" u="none">
                   <a:solidFill>
                     <a:srgbClr val="18293B"/>
                   </a:solidFill>
@@ -617,7 +619,7 @@
           <a:lstStyle/>
           <a:p>
             <a:pPr>
-              <a:defRPr sz="1200" b="0" i="0" u="none" strike="noStrike">
+              <a:defRPr sz="1300" b="0" i="0" u="none" strike="noStrike">
                 <a:solidFill>
                   <a:srgbClr val="5B6B7C"/>
                 </a:solidFill>
@@ -671,7 +673,7 @@
           <a:lstStyle/>
           <a:p>
             <a:pPr>
-              <a:defRPr sz="1100" b="0" i="0" u="none" strike="noStrike">
+              <a:defRPr sz="1200" b="0" i="0" u="none" strike="noStrike">
                 <a:solidFill>
                   <a:srgbClr val="5B6B7C"/>
                 </a:solidFill>
@@ -1105,7 +1107,7 @@
           <a:p>
             <a:r>
               <a:rPr lang="en-US" dirty="0"/>
-              <a:t>Two-minute framing: the goal is HPRC release 2 usable inside the UCSC Genome Browser: search the graph, translate coordinates between any two assemblies, and carry annotations along. August was the month it became end-to-end real on the dev browser.</a:t>
+              <a:t>Goal: HPRC release 2 usable inside the UCSC Genome Browser. August: everything became end-to-end on the dev browser.</a:t>
             </a:r>
             <a:endParaRPr lang="en-US" dirty="0"/>
           </a:p>
@@ -1193,7 +1195,7 @@
           <a:p>
             <a:r>
               <a:rPr lang="en-US" dirty="0"/>
-              <a:t>Walk the three screenshots left to right. Mention the hgConvert integration as the adoption path: nothing new for users to learn.</a:t>
+              <a:t>Mapped once with vg giraffe. All 464 haplotypes scored by identity. Click any haplotype: re-surject, no remapping.</a:t>
             </a:r>
             <a:endParaRPr lang="en-US" dirty="0"/>
           </a:p>
@@ -1281,7 +1283,7 @@
           <a:p>
             <a:r>
               <a:rPr lang="en-US" dirty="0"/>
-              <a:t>Keep this to a minute unless people ask. The routing-table story (17.2 TB to 1.78 GB by dropping stored target intervals) is the one worth telling.</a:t>
+              <a:t>Pangenome Seq track on HG01167 hap1, BLAT-style base-level differences. Just another track.</a:t>
             </a:r>
             <a:endParaRPr lang="en-US" dirty="0"/>
           </a:p>
@@ -1369,7 +1371,7 @@
           <a:p>
             <a:r>
               <a:rPr lang="en-US" dirty="0"/>
-              <a:t>The 19 days figure motivates next month's main item: precomputed chains by direct path intersection, estimated ~300x faster.</a:t>
+              <a:t>CHM13 chr6:32,768,058-32,778,749 to HG02015 paternal, 100% of bases, ~20 ms. Picker can list only assemblies containing the region.</a:t>
             </a:r>
             <a:endParaRPr lang="en-US" dirty="0"/>
           </a:p>
@@ -1457,7 +1459,7 @@
           <a:p>
             <a:r>
               <a:rPr lang="en-US" dirty="0"/>
-              <a:t>Left column is for transparency; right column is what I actually want out of the meeting. Ask for the hdb.c sign-off and the redeploy explicitly.</a:t>
+              <a:t>HG02015 paternal showing CHM13's CAT/Liftoff genes (HLA-DMA), RefSeq, CenSat, under an Alignment Differences track. Chain built in ~1 s from translation blocks; two-phase widening so panning works.</a:t>
             </a:r>
             <a:endParaRPr lang="en-US" dirty="0"/>
           </a:p>
@@ -1545,7 +1547,7 @@
           <a:p>
             <a:r>
               <a:rPr lang="en-US" dirty="0"/>
-              <a:t>Close by asking who wants to try the dev browser pages and send feedback before the HPRC meeting.</a:t>
+              <a:t>Pangenome assemblies in the normal menu; picking one dispatches through the graph. 3 files / 15 lines changed in kent core; 385 tests.</a:t>
             </a:r>
             <a:endParaRPr lang="en-US" dirty="0"/>
           </a:p>
@@ -1569,6 +1571,182 @@
             <a:fld id="{F7021451-1387-4CA6-816F-3879F97B5CBC}" type="slidenum">
               <a:rPr lang="en-US"/>
               <a:t>6</a:t>
+            </a:fld>
+            <a:endParaRPr lang="en-US"/>
+          </a:p>
+        </p:txBody>
+      </p:sp>
+    </p:spTree>
+    <p:extLst>
+      <p:ext uri="{BB962C8B-B14F-4D97-AF65-F5344CB8AC3E}">
+        <p14:creationId xmlns:p14="http://schemas.microsoft.com/office/powerpoint/2010/main" val="1024086991"/>
+      </p:ext>
+    </p:extLst>
+  </p:cSld>
+  <p:clrMapOvr>
+    <a:masterClrMapping/>
+  </p:clrMapOvr>
+</p:notes>
+</file>
+
+<file path=ppt/notesSlides/notesSlide7.xml><?xml version="1.0" encoding="utf-8"?>
+<p:notes xmlns:a="http://schemas.openxmlformats.org/drawingml/2006/main" xmlns:r="http://schemas.openxmlformats.org/officeDocument/2006/relationships" xmlns:p="http://schemas.openxmlformats.org/presentationml/2006/main">
+  <p:cSld>
+    <p:spTree>
+      <p:nvGrpSpPr>
+        <p:cNvPr id="1" name=""/>
+        <p:cNvGrpSpPr/>
+        <p:nvPr/>
+      </p:nvGrpSpPr>
+      <p:grpSpPr>
+        <a:xfrm>
+          <a:off x="0" y="0"/>
+          <a:ext cx="0" cy="0"/>
+          <a:chOff x="0" y="0"/>
+          <a:chExt cx="0" cy="0"/>
+        </a:xfrm>
+      </p:grpSpPr>
+      <p:sp>
+        <p:nvSpPr>
+          <p:cNvPr id="2" name="Slide Image Placeholder 1"/>
+          <p:cNvSpPr>
+            <a:spLocks noGrp="1" noRot="1" noChangeAspect="1"/>
+          </p:cNvSpPr>
+          <p:nvPr>
+            <p:ph type="sldImg"/>
+          </p:nvPr>
+        </p:nvSpPr>
+        <p:spPr/>
+      </p:sp>
+      <p:sp>
+        <p:nvSpPr>
+          <p:cNvPr id="3" name="Notes Placeholder 2"/>
+          <p:cNvSpPr>
+            <a:spLocks noGrp="1"/>
+          </p:cNvSpPr>
+          <p:nvPr>
+            <p:ph type="body" idx="1"/>
+          </p:nvPr>
+        </p:nvSpPr>
+        <p:spPr/>
+        <p:txBody>
+          <a:bodyPr/>
+          <a:lstStyle/>
+          <a:p>
+            <a:r>
+              <a:rPr lang="en-US" dirty="0"/>
+              <a:t>~20 ms gene-scale; 0.6 s at 100 kb; 4.3 s at 1 Mb. 9.6x at 8 threads after the GIL release. Routing table: 1.78 GB, 35 min, zero failure modes (naive: 17.2 TB).</a:t>
+            </a:r>
+            <a:endParaRPr lang="en-US" dirty="0"/>
+          </a:p>
+        </p:txBody>
+      </p:sp>
+      <p:sp>
+        <p:nvSpPr>
+          <p:cNvPr id="4" name="Slide Number Placeholder 3"/>
+          <p:cNvSpPr>
+            <a:spLocks noGrp="1"/>
+          </p:cNvSpPr>
+          <p:nvPr>
+            <p:ph type="sldNum" sz="quarter" idx="10"/>
+          </p:nvPr>
+        </p:nvSpPr>
+        <p:spPr/>
+        <p:txBody>
+          <a:bodyPr/>
+          <a:lstStyle/>
+          <a:p>
+            <a:fld id="{F7021451-1387-4CA6-816F-3879F97B5CBC}" type="slidenum">
+              <a:rPr lang="en-US"/>
+              <a:t>7</a:t>
+            </a:fld>
+            <a:endParaRPr lang="en-US"/>
+          </a:p>
+        </p:txBody>
+      </p:sp>
+    </p:spTree>
+    <p:extLst>
+      <p:ext uri="{BB962C8B-B14F-4D97-AF65-F5344CB8AC3E}">
+        <p14:creationId xmlns:p14="http://schemas.microsoft.com/office/powerpoint/2010/main" val="1024086991"/>
+      </p:ext>
+    </p:extLst>
+  </p:cSld>
+  <p:clrMapOvr>
+    <a:masterClrMapping/>
+  </p:clrMapOvr>
+</p:notes>
+</file>
+
+<file path=ppt/notesSlides/notesSlide8.xml><?xml version="1.0" encoding="utf-8"?>
+<p:notes xmlns:a="http://schemas.openxmlformats.org/drawingml/2006/main" xmlns:r="http://schemas.openxmlformats.org/officeDocument/2006/relationships" xmlns:p="http://schemas.openxmlformats.org/presentationml/2006/main">
+  <p:cSld>
+    <p:spTree>
+      <p:nvGrpSpPr>
+        <p:cNvPr id="1" name=""/>
+        <p:cNvGrpSpPr/>
+        <p:nvPr/>
+      </p:nvGrpSpPr>
+      <p:grpSpPr>
+        <a:xfrm>
+          <a:off x="0" y="0"/>
+          <a:ext cx="0" cy="0"/>
+          <a:chOff x="0" y="0"/>
+          <a:chExt cx="0" cy="0"/>
+        </a:xfrm>
+      </p:grpSpPr>
+      <p:sp>
+        <p:nvSpPr>
+          <p:cNvPr id="2" name="Slide Image Placeholder 1"/>
+          <p:cNvSpPr>
+            <a:spLocks noGrp="1" noRot="1" noChangeAspect="1"/>
+          </p:cNvSpPr>
+          <p:nvPr>
+            <p:ph type="sldImg"/>
+          </p:nvPr>
+        </p:nvSpPr>
+        <p:spPr/>
+      </p:sp>
+      <p:sp>
+        <p:nvSpPr>
+          <p:cNvPr id="3" name="Notes Placeholder 2"/>
+          <p:cNvSpPr>
+            <a:spLocks noGrp="1"/>
+          </p:cNvSpPr>
+          <p:nvPr>
+            <p:ph type="body" idx="1"/>
+          </p:nvPr>
+        </p:nvSpPr>
+        <p:spPr/>
+        <p:txBody>
+          <a:bodyPr/>
+          <a:lstStyle/>
+          <a:p>
+            <a:r>
+              <a:rPr lang="en-US" dirty="0"/>
+              <a:t>Ask explicitly for the hdb.c sign-off and the redeploy.</a:t>
+            </a:r>
+            <a:endParaRPr lang="en-US" dirty="0"/>
+          </a:p>
+        </p:txBody>
+      </p:sp>
+      <p:sp>
+        <p:nvSpPr>
+          <p:cNvPr id="4" name="Slide Number Placeholder 3"/>
+          <p:cNvSpPr>
+            <a:spLocks noGrp="1"/>
+          </p:cNvSpPr>
+          <p:nvPr>
+            <p:ph type="sldNum" sz="quarter" idx="10"/>
+          </p:nvPr>
+        </p:nvSpPr>
+        <p:spPr/>
+        <p:txBody>
+          <a:bodyPr/>
+          <a:lstStyle/>
+          <a:p>
+            <a:fld id="{F7021451-1387-4CA6-816F-3879F97B5CBC}" type="slidenum">
+              <a:rPr lang="en-US"/>
+              <a:t>8</a:t>
             </a:fld>
             <a:endParaRPr lang="en-US"/>
           </a:p>
@@ -1926,7 +2104,7 @@
         </p:nvSpPr>
         <p:spPr>
           <a:xfrm>
-            <a:off x="11277295" y="6446520"/>
+            <a:off x="11368735" y="6492240"/>
             <a:ext cx="457200" cy="274320"/>
           </a:xfrm>
           <a:prstGeom prst="rect">
@@ -1989,8 +2167,8 @@
         </p:nvSpPr>
         <p:spPr>
           <a:xfrm>
-            <a:off x="548640" y="2468880"/>
-            <a:ext cx="11094415" cy="822960"/>
+            <a:off x="457200" y="2468880"/>
+            <a:ext cx="11277295" cy="822960"/>
           </a:xfrm>
           <a:prstGeom prst="rect">
             <a:avLst/>
@@ -2028,8 +2206,8 @@
         </p:nvSpPr>
         <p:spPr>
           <a:xfrm>
-            <a:off x="548640" y="3291840"/>
-            <a:ext cx="11094415" cy="640080"/>
+            <a:off x="457200" y="3291840"/>
+            <a:ext cx="11277295" cy="640080"/>
           </a:xfrm>
           <a:prstGeom prst="rect">
             <a:avLst/>
@@ -2067,8 +2245,8 @@
         </p:nvSpPr>
         <p:spPr>
           <a:xfrm>
-            <a:off x="548640" y="4846320"/>
-            <a:ext cx="11094415" cy="457200"/>
+            <a:off x="457200" y="4846320"/>
+            <a:ext cx="11277295" cy="457200"/>
           </a:xfrm>
           <a:prstGeom prst="rect">
             <a:avLst/>
@@ -2092,7 +2270,7 @@
                 <a:ea typeface="Calibri" pitchFamily="34" charset="-122"/>
                 <a:cs typeface="Calibri" pitchFamily="34" charset="-120"/>
               </a:rPr>
-              <a:t>Parsa Eskandar   •   lab meeting, September 2026</a:t>
+              <a:t>Parsa Eskandar</a:t>
             </a:r>
             <a:endParaRPr lang="en-US" sz="1800" dirty="0"/>
           </a:p>
@@ -2138,8 +2316,8 @@
         </p:nvSpPr>
         <p:spPr>
           <a:xfrm>
-            <a:off x="548640" y="384048"/>
-            <a:ext cx="11094415" cy="685800"/>
+            <a:off x="457200" y="274320"/>
+            <a:ext cx="11277295" cy="640080"/>
           </a:xfrm>
           <a:prstGeom prst="rect">
             <a:avLst/>
@@ -2155,7 +2333,7 @@
               <a:buNone/>
             </a:pPr>
             <a:r>
-              <a:rPr lang="en-US" sz="3200" b="1" dirty="0">
+              <a:rPr lang="en-US" sz="3000" b="1" dirty="0">
                 <a:solidFill>
                   <a:srgbClr val="003C6C"/>
                 </a:solidFill>
@@ -2163,9 +2341,9 @@
                 <a:ea typeface="Calibri" pitchFamily="34" charset="-122"/>
                 <a:cs typeface="Calibri" pitchFamily="34" charset="-120"/>
               </a:rPr>
-              <a:t>Shipped in August: the browser side is end-to-end</a:t>
+              <a:t>Pangenome Mapping: which haplotypes carry my sequence?</a:t>
             </a:r>
-            <a:endParaRPr lang="en-US" sz="3200" dirty="0"/>
+            <a:endParaRPr lang="en-US" sz="3000" dirty="0"/>
           </a:p>
         </p:txBody>
       </p:sp>
@@ -2177,46 +2355,7 @@
         </p:nvSpPr>
         <p:spPr>
           <a:xfrm>
-            <a:off x="548640" y="1024128"/>
-            <a:ext cx="11094415" cy="365760"/>
-          </a:xfrm>
-          <a:prstGeom prst="rect">
-            <a:avLst/>
-          </a:prstGeom>
-          <a:noFill/>
-          <a:ln/>
-        </p:spPr>
-        <p:txBody>
-          <a:bodyPr wrap="square" lIns="0" tIns="0" rIns="0" bIns="0" rtlCol="0" anchor="ctr"/>
-          <a:lstStyle/>
-          <a:p>
-            <a:pPr indent="0" marL="0">
-              <a:buNone/>
-            </a:pPr>
-            <a:r>
-              <a:rPr lang="en-US" sz="1500" dirty="0">
-                <a:solidFill>
-                  <a:srgbClr val="5B6B7C"/>
-                </a:solidFill>
-                <a:latin typeface="Calibri" pitchFamily="34" charset="0"/>
-                <a:ea typeface="Calibri" pitchFamily="34" charset="-122"/>
-                <a:cs typeface="Calibri" pitchFamily="34" charset="-120"/>
-              </a:rPr>
-              <a:t>All three pages run on hgwdev against the HPRC v2.0 graph</a:t>
-            </a:r>
-            <a:endParaRPr lang="en-US" sz="1500" dirty="0"/>
-          </a:p>
-        </p:txBody>
-      </p:sp>
-      <p:sp>
-        <p:nvSpPr>
-          <p:cNvPr id="4" name="Text 2"/>
-          <p:cNvSpPr txBox="1"/>
-          <p:nvPr/>
-        </p:nvSpPr>
-        <p:spPr>
-          <a:xfrm>
-            <a:off x="11277295" y="6446520"/>
+            <a:off x="11368735" y="6492240"/>
             <a:ext cx="457200" cy="274320"/>
           </a:xfrm>
           <a:prstGeom prst="rect">
@@ -2249,18 +2388,18 @@
       </p:sp>
       <p:sp>
         <p:nvSpPr>
-          <p:cNvPr id="5" name="Shape 3"/>
+          <p:cNvPr id="4" name="Shape 2"/>
           <p:cNvSpPr/>
           <p:nvPr/>
         </p:nvSpPr>
         <p:spPr>
           <a:xfrm>
-            <a:off x="548640" y="1508760"/>
-            <a:ext cx="3454298" cy="2245097"/>
+            <a:off x="1653918" y="1051560"/>
+            <a:ext cx="8883858" cy="5303520"/>
           </a:xfrm>
           <a:prstGeom prst="roundRect">
             <a:avLst>
-              <a:gd name="adj" fmla="val 4887"/>
+              <a:gd name="adj" fmla="val 2069"/>
             </a:avLst>
           </a:prstGeom>
           <a:solidFill>
@@ -2276,13 +2415,13 @@
       </p:sp>
       <p:sp>
         <p:nvSpPr>
-          <p:cNvPr id="6" name="Shape 4"/>
+          <p:cNvPr id="5" name="Shape 3"/>
           <p:cNvSpPr/>
           <p:nvPr/>
         </p:nvSpPr>
         <p:spPr>
           <a:xfrm>
-            <a:off x="694944" y="1600200"/>
+            <a:off x="1800222" y="1143000"/>
             <a:ext cx="100584" cy="100584"/>
           </a:xfrm>
           <a:prstGeom prst="ellipse">
@@ -2301,13 +2440,13 @@
       </p:sp>
       <p:sp>
         <p:nvSpPr>
-          <p:cNvPr id="7" name="Shape 5"/>
+          <p:cNvPr id="6" name="Shape 4"/>
           <p:cNvSpPr/>
           <p:nvPr/>
         </p:nvSpPr>
         <p:spPr>
           <a:xfrm>
-            <a:off x="859536" y="1600200"/>
+            <a:off x="1964814" y="1143000"/>
             <a:ext cx="100584" cy="100584"/>
           </a:xfrm>
           <a:prstGeom prst="ellipse">
@@ -2326,13 +2465,13 @@
       </p:sp>
       <p:sp>
         <p:nvSpPr>
-          <p:cNvPr id="8" name="Shape 6"/>
+          <p:cNvPr id="7" name="Shape 5"/>
           <p:cNvSpPr/>
           <p:nvPr/>
         </p:nvSpPr>
         <p:spPr>
           <a:xfrm>
-            <a:off x="1024128" y="1600200"/>
+            <a:off x="2129406" y="1143000"/>
             <a:ext cx="100584" cy="100584"/>
           </a:xfrm>
           <a:prstGeom prst="ellipse">
@@ -2349,6 +2488,45 @@
           </a:ln>
         </p:spPr>
       </p:sp>
+      <p:sp>
+        <p:nvSpPr>
+          <p:cNvPr id="8" name="Text 6"/>
+          <p:cNvSpPr txBox="1"/>
+          <p:nvPr/>
+        </p:nvSpPr>
+        <p:spPr>
+          <a:xfrm>
+            <a:off x="2431158" y="1078992"/>
+            <a:ext cx="3657600" cy="237744"/>
+          </a:xfrm>
+          <a:prstGeom prst="rect">
+            <a:avLst/>
+          </a:prstGeom>
+          <a:noFill/>
+          <a:ln/>
+        </p:spPr>
+        <p:txBody>
+          <a:bodyPr wrap="square" lIns="0" tIns="0" rIns="0" bIns="0" rtlCol="0" anchor="ctr"/>
+          <a:lstStyle/>
+          <a:p>
+            <a:pPr indent="0" marL="0">
+              <a:buNone/>
+            </a:pPr>
+            <a:r>
+              <a:rPr lang="en-US" sz="900" dirty="0">
+                <a:solidFill>
+                  <a:srgbClr val="5B6B7C"/>
+                </a:solidFill>
+                <a:latin typeface="Courier New" pitchFamily="34" charset="0"/>
+                <a:ea typeface="Courier New" pitchFamily="34" charset="-122"/>
+                <a:cs typeface="Courier New" pitchFamily="34" charset="-120"/>
+              </a:rPr>
+              <a:t>hgwdev-seeskand.gi.ucsc.edu</a:t>
+            </a:r>
+            <a:endParaRPr lang="en-US" sz="900" dirty="0"/>
+          </a:p>
+        </p:txBody>
+      </p:sp>
       <p:pic>
         <p:nvPicPr>
           <p:cNvPr id="9" name="Image 0" descr="/Users/seeskand/Documents/HPRC/2026/hprc_2026_poster/talk/figures/mapping_page.png">    </p:cNvPr>
@@ -2365,539 +2543,14 @@
         </p:blipFill>
         <p:spPr>
           <a:xfrm>
-            <a:off x="640080" y="1819656"/>
-            <a:ext cx="3271418" cy="1842761"/>
+            <a:off x="1745358" y="1362456"/>
+            <a:ext cx="8700978" cy="4901184"/>
           </a:xfrm>
           <a:prstGeom prst="rect">
             <a:avLst/>
           </a:prstGeom>
         </p:spPr>
       </p:pic>
-      <p:sp>
-        <p:nvSpPr>
-          <p:cNvPr id="10" name="Shape 7"/>
-          <p:cNvSpPr/>
-          <p:nvPr/>
-        </p:nvSpPr>
-        <p:spPr>
-          <a:xfrm>
-            <a:off x="4368698" y="1508760"/>
-            <a:ext cx="3454298" cy="2038045"/>
-          </a:xfrm>
-          <a:prstGeom prst="roundRect">
-            <a:avLst>
-              <a:gd name="adj" fmla="val 5384"/>
-            </a:avLst>
-          </a:prstGeom>
-          <a:solidFill>
-            <a:srgbClr val="F1F4F8"/>
-          </a:solidFill>
-          <a:ln w="12700">
-            <a:solidFill>
-              <a:srgbClr val="F1F4F8"/>
-            </a:solidFill>
-            <a:prstDash val="solid"/>
-          </a:ln>
-        </p:spPr>
-      </p:sp>
-      <p:sp>
-        <p:nvSpPr>
-          <p:cNvPr id="11" name="Shape 8"/>
-          <p:cNvSpPr/>
-          <p:nvPr/>
-        </p:nvSpPr>
-        <p:spPr>
-          <a:xfrm>
-            <a:off x="4515002" y="1600200"/>
-            <a:ext cx="100584" cy="100584"/>
-          </a:xfrm>
-          <a:prstGeom prst="ellipse">
-            <a:avLst/>
-          </a:prstGeom>
-          <a:solidFill>
-            <a:srgbClr val="E4572E"/>
-          </a:solidFill>
-          <a:ln w="12700">
-            <a:solidFill>
-              <a:srgbClr val="E4572E"/>
-            </a:solidFill>
-            <a:prstDash val="solid"/>
-          </a:ln>
-        </p:spPr>
-      </p:sp>
-      <p:sp>
-        <p:nvSpPr>
-          <p:cNvPr id="12" name="Shape 9"/>
-          <p:cNvSpPr/>
-          <p:nvPr/>
-        </p:nvSpPr>
-        <p:spPr>
-          <a:xfrm>
-            <a:off x="4679594" y="1600200"/>
-            <a:ext cx="100584" cy="100584"/>
-          </a:xfrm>
-          <a:prstGeom prst="ellipse">
-            <a:avLst/>
-          </a:prstGeom>
-          <a:solidFill>
-            <a:srgbClr val="FDC700"/>
-          </a:solidFill>
-          <a:ln w="12700">
-            <a:solidFill>
-              <a:srgbClr val="FDC700"/>
-            </a:solidFill>
-            <a:prstDash val="solid"/>
-          </a:ln>
-        </p:spPr>
-      </p:sp>
-      <p:sp>
-        <p:nvSpPr>
-          <p:cNvPr id="13" name="Shape 10"/>
-          <p:cNvSpPr/>
-          <p:nvPr/>
-        </p:nvSpPr>
-        <p:spPr>
-          <a:xfrm>
-            <a:off x="4844186" y="1600200"/>
-            <a:ext cx="100584" cy="100584"/>
-          </a:xfrm>
-          <a:prstGeom prst="ellipse">
-            <a:avLst/>
-          </a:prstGeom>
-          <a:solidFill>
-            <a:srgbClr val="2E7D32"/>
-          </a:solidFill>
-          <a:ln w="12700">
-            <a:solidFill>
-              <a:srgbClr val="2E7D32"/>
-            </a:solidFill>
-            <a:prstDash val="solid"/>
-          </a:ln>
-        </p:spPr>
-      </p:sp>
-      <p:pic>
-        <p:nvPicPr>
-          <p:cNvPr id="14" name="Image 1" descr="/Users/seeskand/Documents/HPRC/2026/hprc_2026_poster/talk/figures/convert_page.png">    </p:cNvPr>
-          <p:cNvPicPr>
-            <a:picLocks noChangeAspect="1"/>
-          </p:cNvPicPr>
-          <p:nvPr/>
-        </p:nvPicPr>
-        <p:blipFill>
-          <a:blip r:embed="rId2"/>
-          <a:stretch>
-            <a:fillRect/>
-          </a:stretch>
-        </p:blipFill>
-        <p:spPr>
-          <a:xfrm>
-            <a:off x="4460138" y="1819656"/>
-            <a:ext cx="3271418" cy="1635709"/>
-          </a:xfrm>
-          <a:prstGeom prst="rect">
-            <a:avLst/>
-          </a:prstGeom>
-        </p:spPr>
-      </p:pic>
-      <p:sp>
-        <p:nvSpPr>
-          <p:cNvPr id="15" name="Shape 11"/>
-          <p:cNvSpPr/>
-          <p:nvPr/>
-        </p:nvSpPr>
-        <p:spPr>
-          <a:xfrm>
-            <a:off x="8188757" y="1508760"/>
-            <a:ext cx="3454298" cy="1144670"/>
-          </a:xfrm>
-          <a:prstGeom prst="roundRect">
-            <a:avLst>
-              <a:gd name="adj" fmla="val 9586"/>
-            </a:avLst>
-          </a:prstGeom>
-          <a:solidFill>
-            <a:srgbClr val="F1F4F8"/>
-          </a:solidFill>
-          <a:ln w="12700">
-            <a:solidFill>
-              <a:srgbClr val="F1F4F8"/>
-            </a:solidFill>
-            <a:prstDash val="solid"/>
-          </a:ln>
-        </p:spPr>
-      </p:sp>
-      <p:sp>
-        <p:nvSpPr>
-          <p:cNvPr id="16" name="Shape 12"/>
-          <p:cNvSpPr/>
-          <p:nvPr/>
-        </p:nvSpPr>
-        <p:spPr>
-          <a:xfrm>
-            <a:off x="8335061" y="1600200"/>
-            <a:ext cx="100584" cy="100584"/>
-          </a:xfrm>
-          <a:prstGeom prst="ellipse">
-            <a:avLst/>
-          </a:prstGeom>
-          <a:solidFill>
-            <a:srgbClr val="E4572E"/>
-          </a:solidFill>
-          <a:ln w="12700">
-            <a:solidFill>
-              <a:srgbClr val="E4572E"/>
-            </a:solidFill>
-            <a:prstDash val="solid"/>
-          </a:ln>
-        </p:spPr>
-      </p:sp>
-      <p:sp>
-        <p:nvSpPr>
-          <p:cNvPr id="17" name="Shape 13"/>
-          <p:cNvSpPr/>
-          <p:nvPr/>
-        </p:nvSpPr>
-        <p:spPr>
-          <a:xfrm>
-            <a:off x="8499653" y="1600200"/>
-            <a:ext cx="100584" cy="100584"/>
-          </a:xfrm>
-          <a:prstGeom prst="ellipse">
-            <a:avLst/>
-          </a:prstGeom>
-          <a:solidFill>
-            <a:srgbClr val="FDC700"/>
-          </a:solidFill>
-          <a:ln w="12700">
-            <a:solidFill>
-              <a:srgbClr val="FDC700"/>
-            </a:solidFill>
-            <a:prstDash val="solid"/>
-          </a:ln>
-        </p:spPr>
-      </p:sp>
-      <p:sp>
-        <p:nvSpPr>
-          <p:cNvPr id="18" name="Shape 14"/>
-          <p:cNvSpPr/>
-          <p:nvPr/>
-        </p:nvSpPr>
-        <p:spPr>
-          <a:xfrm>
-            <a:off x="8664245" y="1600200"/>
-            <a:ext cx="100584" cy="100584"/>
-          </a:xfrm>
-          <a:prstGeom prst="ellipse">
-            <a:avLst/>
-          </a:prstGeom>
-          <a:solidFill>
-            <a:srgbClr val="2E7D32"/>
-          </a:solidFill>
-          <a:ln w="12700">
-            <a:solidFill>
-              <a:srgbClr val="2E7D32"/>
-            </a:solidFill>
-            <a:prstDash val="solid"/>
-          </a:ln>
-        </p:spPr>
-      </p:sp>
-      <p:pic>
-        <p:nvPicPr>
-          <p:cNvPr id="19" name="Image 2" descr="/Users/seeskand/Documents/HPRC/2026/hprc_2026_poster/talk/figures/lifted_annotations.png">    </p:cNvPr>
-          <p:cNvPicPr>
-            <a:picLocks noChangeAspect="1"/>
-          </p:cNvPicPr>
-          <p:nvPr/>
-        </p:nvPicPr>
-        <p:blipFill>
-          <a:blip r:embed="rId3"/>
-          <a:stretch>
-            <a:fillRect/>
-          </a:stretch>
-        </p:blipFill>
-        <p:spPr>
-          <a:xfrm>
-            <a:off x="8280197" y="1819656"/>
-            <a:ext cx="3271418" cy="742334"/>
-          </a:xfrm>
-          <a:prstGeom prst="rect">
-            <a:avLst/>
-          </a:prstGeom>
-        </p:spPr>
-      </p:pic>
-      <p:sp>
-        <p:nvSpPr>
-          <p:cNvPr id="20" name="Text 15"/>
-          <p:cNvSpPr txBox="1"/>
-          <p:nvPr/>
-        </p:nvSpPr>
-        <p:spPr>
-          <a:xfrm>
-            <a:off x="548640" y="3982457"/>
-            <a:ext cx="3454298" cy="411480"/>
-          </a:xfrm>
-          <a:prstGeom prst="rect">
-            <a:avLst/>
-          </a:prstGeom>
-          <a:noFill/>
-          <a:ln/>
-        </p:spPr>
-        <p:txBody>
-          <a:bodyPr wrap="square" lIns="0" tIns="0" rIns="0" bIns="0" rtlCol="0" anchor="t"/>
-          <a:lstStyle/>
-          <a:p>
-            <a:pPr indent="0" marL="0">
-              <a:buNone/>
-            </a:pPr>
-            <a:r>
-              <a:rPr lang="en-US" sz="1800" b="1" dirty="0">
-                <a:solidFill>
-                  <a:srgbClr val="003C6C"/>
-                </a:solidFill>
-                <a:latin typeface="Calibri" pitchFamily="34" charset="0"/>
-                <a:ea typeface="Calibri" pitchFamily="34" charset="-122"/>
-                <a:cs typeface="Calibri" pitchFamily="34" charset="-120"/>
-              </a:rPr>
-              <a:t>Pangenome Mapping</a:t>
-            </a:r>
-            <a:endParaRPr lang="en-US" sz="1800" dirty="0"/>
-          </a:p>
-        </p:txBody>
-      </p:sp>
-      <p:sp>
-        <p:nvSpPr>
-          <p:cNvPr id="21" name="Text 16"/>
-          <p:cNvSpPr txBox="1"/>
-          <p:nvPr/>
-        </p:nvSpPr>
-        <p:spPr>
-          <a:xfrm>
-            <a:off x="548640" y="4439657"/>
-            <a:ext cx="3454298" cy="1280160"/>
-          </a:xfrm>
-          <a:prstGeom prst="rect">
-            <a:avLst/>
-          </a:prstGeom>
-          <a:noFill/>
-          <a:ln/>
-        </p:spPr>
-        <p:txBody>
-          <a:bodyPr wrap="square" lIns="0" tIns="0" rIns="0" bIns="0" rtlCol="0" anchor="t"/>
-          <a:lstStyle/>
-          <a:p>
-            <a:pPr indent="0" marL="0">
-              <a:buNone/>
-            </a:pPr>
-            <a:r>
-              <a:rPr lang="en-US" sz="1400" dirty="0">
-                <a:solidFill>
-                  <a:srgbClr val="18293B"/>
-                </a:solidFill>
-                <a:latin typeface="Calibri" pitchFamily="34" charset="0"/>
-                <a:ea typeface="Calibri" pitchFamily="34" charset="-122"/>
-                <a:cs typeface="Calibri" pitchFamily="34" charset="-120"/>
-              </a:rPr>
-              <a:t>paste a sequence, all 464 haplotypes ranked by identity, one-click position on any of them</a:t>
-            </a:r>
-            <a:endParaRPr lang="en-US" sz="1400" dirty="0"/>
-          </a:p>
-        </p:txBody>
-      </p:sp>
-      <p:sp>
-        <p:nvSpPr>
-          <p:cNvPr id="22" name="Text 17"/>
-          <p:cNvSpPr txBox="1"/>
-          <p:nvPr/>
-        </p:nvSpPr>
-        <p:spPr>
-          <a:xfrm>
-            <a:off x="4368698" y="3982457"/>
-            <a:ext cx="3454298" cy="411480"/>
-          </a:xfrm>
-          <a:prstGeom prst="rect">
-            <a:avLst/>
-          </a:prstGeom>
-          <a:noFill/>
-          <a:ln/>
-        </p:spPr>
-        <p:txBody>
-          <a:bodyPr wrap="square" lIns="0" tIns="0" rIns="0" bIns="0" rtlCol="0" anchor="t"/>
-          <a:lstStyle/>
-          <a:p>
-            <a:pPr indent="0" marL="0">
-              <a:buNone/>
-            </a:pPr>
-            <a:r>
-              <a:rPr lang="en-US" sz="1800" b="1" dirty="0">
-                <a:solidFill>
-                  <a:srgbClr val="003C6C"/>
-                </a:solidFill>
-                <a:latin typeface="Calibri" pitchFamily="34" charset="0"/>
-                <a:ea typeface="Calibri" pitchFamily="34" charset="-122"/>
-                <a:cs typeface="Calibri" pitchFamily="34" charset="-120"/>
-              </a:rPr>
-              <a:t>Convert Coordinates</a:t>
-            </a:r>
-            <a:endParaRPr lang="en-US" sz="1800" dirty="0"/>
-          </a:p>
-        </p:txBody>
-      </p:sp>
-      <p:sp>
-        <p:nvSpPr>
-          <p:cNvPr id="23" name="Text 18"/>
-          <p:cNvSpPr txBox="1"/>
-          <p:nvPr/>
-        </p:nvSpPr>
-        <p:spPr>
-          <a:xfrm>
-            <a:off x="4368698" y="4439657"/>
-            <a:ext cx="3454298" cy="1280160"/>
-          </a:xfrm>
-          <a:prstGeom prst="rect">
-            <a:avLst/>
-          </a:prstGeom>
-          <a:noFill/>
-          <a:ln/>
-        </p:spPr>
-        <p:txBody>
-          <a:bodyPr wrap="square" lIns="0" tIns="0" rIns="0" bIns="0" rtlCol="0" anchor="t"/>
-          <a:lstStyle/>
-          <a:p>
-            <a:pPr indent="0" marL="0">
-              <a:buNone/>
-            </a:pPr>
-            <a:r>
-              <a:rPr lang="en-US" sz="1400" dirty="0">
-                <a:solidFill>
-                  <a:srgbClr val="18293B"/>
-                </a:solidFill>
-                <a:latin typeface="Calibri" pitchFamily="34" charset="0"/>
-                <a:ea typeface="Calibri" pitchFamily="34" charset="-122"/>
-                <a:cs typeface="Calibri" pitchFamily="34" charset="-120"/>
-              </a:rPr>
-              <a:t>any-to-any translation with a scored picker that lists only assemblies containing the region</a:t>
-            </a:r>
-            <a:endParaRPr lang="en-US" sz="1400" dirty="0"/>
-          </a:p>
-        </p:txBody>
-      </p:sp>
-      <p:sp>
-        <p:nvSpPr>
-          <p:cNvPr id="24" name="Text 19"/>
-          <p:cNvSpPr txBox="1"/>
-          <p:nvPr/>
-        </p:nvSpPr>
-        <p:spPr>
-          <a:xfrm>
-            <a:off x="8188757" y="3982457"/>
-            <a:ext cx="3454298" cy="411480"/>
-          </a:xfrm>
-          <a:prstGeom prst="rect">
-            <a:avLst/>
-          </a:prstGeom>
-          <a:noFill/>
-          <a:ln/>
-        </p:spPr>
-        <p:txBody>
-          <a:bodyPr wrap="square" lIns="0" tIns="0" rIns="0" bIns="0" rtlCol="0" anchor="t"/>
-          <a:lstStyle/>
-          <a:p>
-            <a:pPr indent="0" marL="0">
-              <a:buNone/>
-            </a:pPr>
-            <a:r>
-              <a:rPr lang="en-US" sz="1800" b="1" dirty="0">
-                <a:solidFill>
-                  <a:srgbClr val="003C6C"/>
-                </a:solidFill>
-                <a:latin typeface="Calibri" pitchFamily="34" charset="0"/>
-                <a:ea typeface="Calibri" pitchFamily="34" charset="-122"/>
-                <a:cs typeface="Calibri" pitchFamily="34" charset="-120"/>
-              </a:rPr>
-              <a:t>Annotations follow you</a:t>
-            </a:r>
-            <a:endParaRPr lang="en-US" sz="1800" dirty="0"/>
-          </a:p>
-        </p:txBody>
-      </p:sp>
-      <p:sp>
-        <p:nvSpPr>
-          <p:cNvPr id="25" name="Text 20"/>
-          <p:cNvSpPr txBox="1"/>
-          <p:nvPr/>
-        </p:nvSpPr>
-        <p:spPr>
-          <a:xfrm>
-            <a:off x="8188757" y="4439657"/>
-            <a:ext cx="3454298" cy="1280160"/>
-          </a:xfrm>
-          <a:prstGeom prst="rect">
-            <a:avLst/>
-          </a:prstGeom>
-          <a:noFill/>
-          <a:ln/>
-        </p:spPr>
-        <p:txBody>
-          <a:bodyPr wrap="square" lIns="0" tIns="0" rIns="0" bIns="0" rtlCol="0" anchor="t"/>
-          <a:lstStyle/>
-          <a:p>
-            <a:pPr indent="0" marL="0">
-              <a:buNone/>
-            </a:pPr>
-            <a:r>
-              <a:rPr lang="en-US" sz="1400" dirty="0">
-                <a:solidFill>
-                  <a:srgbClr val="18293B"/>
-                </a:solidFill>
-                <a:latin typeface="Calibri" pitchFamily="34" charset="0"/>
-                <a:ea typeface="Calibri" pitchFamily="34" charset="-122"/>
-                <a:cs typeface="Calibri" pitchFamily="34" charset="-120"/>
-              </a:rPr>
-              <a:t>QuickLift chains built per request from the graph, plus an Alignment Differences track</a:t>
-            </a:r>
-            <a:endParaRPr lang="en-US" sz="1400" dirty="0"/>
-          </a:p>
-        </p:txBody>
-      </p:sp>
-      <p:sp>
-        <p:nvSpPr>
-          <p:cNvPr id="26" name="Text 21"/>
-          <p:cNvSpPr txBox="1"/>
-          <p:nvPr/>
-        </p:nvSpPr>
-        <p:spPr>
-          <a:xfrm>
-            <a:off x="548640" y="5989320"/>
-            <a:ext cx="11094415" cy="457200"/>
-          </a:xfrm>
-          <a:prstGeom prst="rect">
-            <a:avLst/>
-          </a:prstGeom>
-          <a:noFill/>
-          <a:ln/>
-        </p:spPr>
-        <p:txBody>
-          <a:bodyPr wrap="square" lIns="0" tIns="0" rIns="0" bIns="0" rtlCol="0" anchor="t"/>
-          <a:lstStyle/>
-          <a:p>
-            <a:pPr indent="0" marL="0">
-              <a:buNone/>
-            </a:pPr>
-            <a:r>
-              <a:rPr lang="en-US" sz="1400" i="1" dirty="0">
-                <a:solidFill>
-                  <a:srgbClr val="5B6B7C"/>
-                </a:solidFill>
-                <a:latin typeface="Calibri" pitchFamily="34" charset="0"/>
-                <a:ea typeface="Calibri" pitchFamily="34" charset="-122"/>
-                <a:cs typeface="Calibri" pitchFamily="34" charset="-120"/>
-              </a:rPr>
-              <a:t>Also: pangenome assemblies appear in the stock hgConvert menu; core kent changes stayed at 3 files / 15 lines; 385 browser-side tests passing.</a:t>
-            </a:r>
-            <a:endParaRPr lang="en-US" sz="1400" dirty="0"/>
-          </a:p>
-        </p:txBody>
-      </p:sp>
     </p:spTree>
   </p:cSld>
   <p:clrMapOvr>
@@ -2938,8 +2591,8 @@
         </p:nvSpPr>
         <p:spPr>
           <a:xfrm>
-            <a:off x="548640" y="384048"/>
-            <a:ext cx="11094415" cy="685800"/>
+            <a:off x="457200" y="274320"/>
+            <a:ext cx="11277295" cy="640080"/>
           </a:xfrm>
           <a:prstGeom prst="rect">
             <a:avLst/>
@@ -2955,7 +2608,7 @@
               <a:buNone/>
             </a:pPr>
             <a:r>
-              <a:rPr lang="en-US" sz="3200" b="1" dirty="0">
+              <a:rPr lang="en-US" sz="3000" b="1" dirty="0">
                 <a:solidFill>
                   <a:srgbClr val="003C6C"/>
                 </a:solidFill>
@@ -2963,9 +2616,9 @@
                 <a:ea typeface="Calibri" pitchFamily="34" charset="-122"/>
                 <a:cs typeface="Calibri" pitchFamily="34" charset="-120"/>
               </a:rPr>
-              <a:t>Under the hood: four things that changed this month</a:t>
+              <a:t>The hit lands as a native track</a:t>
             </a:r>
-            <a:endParaRPr lang="en-US" sz="3200" dirty="0"/>
+            <a:endParaRPr lang="en-US" sz="3000" dirty="0"/>
           </a:p>
         </p:txBody>
       </p:sp>
@@ -2977,7 +2630,7 @@
         </p:nvSpPr>
         <p:spPr>
           <a:xfrm>
-            <a:off x="11277295" y="6446520"/>
+            <a:off x="11368735" y="6492240"/>
             <a:ext cx="457200" cy="274320"/>
           </a:xfrm>
           <a:prstGeom prst="rect">
@@ -3016,12 +2669,12 @@
         </p:nvSpPr>
         <p:spPr>
           <a:xfrm>
-            <a:off x="548640" y="1371600"/>
-            <a:ext cx="11094415" cy="1097280"/>
+            <a:off x="457200" y="1051560"/>
+            <a:ext cx="11277295" cy="3546302"/>
           </a:xfrm>
           <a:prstGeom prst="roundRect">
             <a:avLst>
-              <a:gd name="adj" fmla="val 10000"/>
+              <a:gd name="adj" fmla="val 3094"/>
             </a:avLst>
           </a:prstGeom>
           <a:solidFill>
@@ -3043,26 +2696,115 @@
         </p:nvSpPr>
         <p:spPr>
           <a:xfrm>
-            <a:off x="777240" y="1627632"/>
-            <a:ext cx="594360" cy="594360"/>
+            <a:off x="603504" y="1143000"/>
+            <a:ext cx="100584" cy="100584"/>
           </a:xfrm>
           <a:prstGeom prst="ellipse">
             <a:avLst/>
           </a:prstGeom>
           <a:solidFill>
-            <a:srgbClr val="003C6C"/>
+            <a:srgbClr val="E4572E"/>
           </a:solidFill>
           <a:ln w="12700">
             <a:solidFill>
-              <a:srgbClr val="003C6C"/>
+              <a:srgbClr val="E4572E"/>
             </a:solidFill>
             <a:prstDash val="solid"/>
           </a:ln>
         </p:spPr>
       </p:sp>
+      <p:sp>
+        <p:nvSpPr>
+          <p:cNvPr id="6" name="Shape 4"/>
+          <p:cNvSpPr/>
+          <p:nvPr/>
+        </p:nvSpPr>
+        <p:spPr>
+          <a:xfrm>
+            <a:off x="768096" y="1143000"/>
+            <a:ext cx="100584" cy="100584"/>
+          </a:xfrm>
+          <a:prstGeom prst="ellipse">
+            <a:avLst/>
+          </a:prstGeom>
+          <a:solidFill>
+            <a:srgbClr val="FDC700"/>
+          </a:solidFill>
+          <a:ln w="12700">
+            <a:solidFill>
+              <a:srgbClr val="FDC700"/>
+            </a:solidFill>
+            <a:prstDash val="solid"/>
+          </a:ln>
+        </p:spPr>
+      </p:sp>
+      <p:sp>
+        <p:nvSpPr>
+          <p:cNvPr id="7" name="Shape 5"/>
+          <p:cNvSpPr/>
+          <p:nvPr/>
+        </p:nvSpPr>
+        <p:spPr>
+          <a:xfrm>
+            <a:off x="932688" y="1143000"/>
+            <a:ext cx="100584" cy="100584"/>
+          </a:xfrm>
+          <a:prstGeom prst="ellipse">
+            <a:avLst/>
+          </a:prstGeom>
+          <a:solidFill>
+            <a:srgbClr val="2E7D32"/>
+          </a:solidFill>
+          <a:ln w="12700">
+            <a:solidFill>
+              <a:srgbClr val="2E7D32"/>
+            </a:solidFill>
+            <a:prstDash val="solid"/>
+          </a:ln>
+        </p:spPr>
+      </p:sp>
+      <p:sp>
+        <p:nvSpPr>
+          <p:cNvPr id="8" name="Text 6"/>
+          <p:cNvSpPr txBox="1"/>
+          <p:nvPr/>
+        </p:nvSpPr>
+        <p:spPr>
+          <a:xfrm>
+            <a:off x="1234440" y="1078992"/>
+            <a:ext cx="3657600" cy="237744"/>
+          </a:xfrm>
+          <a:prstGeom prst="rect">
+            <a:avLst/>
+          </a:prstGeom>
+          <a:noFill/>
+          <a:ln/>
+        </p:spPr>
+        <p:txBody>
+          <a:bodyPr wrap="square" lIns="0" tIns="0" rIns="0" bIns="0" rtlCol="0" anchor="ctr"/>
+          <a:lstStyle/>
+          <a:p>
+            <a:pPr indent="0" marL="0">
+              <a:buNone/>
+            </a:pPr>
+            <a:r>
+              <a:rPr lang="en-US" sz="900" dirty="0">
+                <a:solidFill>
+                  <a:srgbClr val="5B6B7C"/>
+                </a:solidFill>
+                <a:latin typeface="Courier New" pitchFamily="34" charset="0"/>
+                <a:ea typeface="Courier New" pitchFamily="34" charset="-122"/>
+                <a:cs typeface="Courier New" pitchFamily="34" charset="-120"/>
+              </a:rPr>
+              <a:t>hgwdev-seeskand.gi.ucsc.edu</a:t>
+            </a:r>
+            <a:endParaRPr lang="en-US" sz="900" dirty="0"/>
+          </a:p>
+        </p:txBody>
+      </p:sp>
       <p:pic>
         <p:nvPicPr>
-          <p:cNvPr id="6" name="Image 0" descr="preencoded.png">    </p:cNvPr>
+          <p:cNvPr id="9" name="Image 0" descr="/Users/seeskand/Documents/HPRC/2026/hprc_2026_poster/talk/figures/pangenome_seq_track.png">    </p:cNvPr>
           <p:cNvPicPr>
             <a:picLocks noChangeAspect="1"/>
           </p:cNvPicPr>
@@ -3076,554 +2818,14 @@
         </p:blipFill>
         <p:spPr>
           <a:xfrm>
-            <a:off x="931774" y="1782166"/>
-            <a:ext cx="285293" cy="285293"/>
+            <a:off x="548640" y="1362456"/>
+            <a:ext cx="11094415" cy="3143966"/>
           </a:xfrm>
           <a:prstGeom prst="rect">
             <a:avLst/>
           </a:prstGeom>
         </p:spPr>
       </p:pic>
-      <p:sp>
-        <p:nvSpPr>
-          <p:cNvPr id="7" name="Text 4"/>
-          <p:cNvSpPr txBox="1"/>
-          <p:nvPr/>
-        </p:nvSpPr>
-        <p:spPr>
-          <a:xfrm>
-            <a:off x="1600200" y="1508760"/>
-            <a:ext cx="9814255" cy="365760"/>
-          </a:xfrm>
-          <a:prstGeom prst="rect">
-            <a:avLst/>
-          </a:prstGeom>
-          <a:noFill/>
-          <a:ln/>
-        </p:spPr>
-        <p:txBody>
-          <a:bodyPr wrap="square" lIns="0" tIns="0" rIns="0" bIns="0" rtlCol="0" anchor="t"/>
-          <a:lstStyle/>
-          <a:p>
-            <a:pPr indent="0" marL="0">
-              <a:buNone/>
-            </a:pPr>
-            <a:r>
-              <a:rPr lang="en-US" sz="1700" b="1" dirty="0">
-                <a:solidFill>
-                  <a:srgbClr val="003C6C"/>
-                </a:solidFill>
-                <a:latin typeface="Calibri" pitchFamily="34" charset="0"/>
-                <a:ea typeface="Calibri" pitchFamily="34" charset="-122"/>
-                <a:cs typeface="Calibri" pitchFamily="34" charset="-120"/>
-              </a:rPr>
-              <a:t>Routing table (Table 2) rebuilt as routing-only</a:t>
-            </a:r>
-            <a:endParaRPr lang="en-US" sz="1700" dirty="0"/>
-          </a:p>
-        </p:txBody>
-      </p:sp>
-      <p:sp>
-        <p:nvSpPr>
-          <p:cNvPr id="8" name="Text 5"/>
-          <p:cNvSpPr txBox="1"/>
-          <p:nvPr/>
-        </p:nvSpPr>
-        <p:spPr>
-          <a:xfrm>
-            <a:off x="1600200" y="1874520"/>
-            <a:ext cx="9814255" cy="594360"/>
-          </a:xfrm>
-          <a:prstGeom prst="rect">
-            <a:avLst/>
-          </a:prstGeom>
-          <a:noFill/>
-          <a:ln/>
-        </p:spPr>
-        <p:txBody>
-          <a:bodyPr wrap="square" lIns="0" tIns="0" rIns="0" bIns="0" rtlCol="0" anchor="t"/>
-          <a:lstStyle/>
-          <a:p>
-            <a:pPr indent="0" marL="0">
-              <a:buNone/>
-            </a:pPr>
-            <a:r>
-              <a:rPr lang="en-US" sz="1350" dirty="0">
-                <a:solidFill>
-                  <a:srgbClr val="18293B"/>
-                </a:solidFill>
-                <a:latin typeface="Calibri" pitchFamily="34" charset="0"/>
-                <a:ea typeface="Calibri" pitchFamily="34" charset="-122"/>
-                <a:cs typeface="Calibri" pitchFamily="34" charset="-120"/>
-              </a:rPr>
-              <a:t>34M keys, 1.78 GB, 35 min at 32 threads. Zero abandoned runs and zero splits, down from 5.0M and 35.7M. A naive all-pairs table would have been 17.2 TB.</a:t>
-            </a:r>
-            <a:endParaRPr lang="en-US" sz="1350" dirty="0"/>
-          </a:p>
-        </p:txBody>
-      </p:sp>
-      <p:sp>
-        <p:nvSpPr>
-          <p:cNvPr id="9" name="Shape 6"/>
-          <p:cNvSpPr/>
-          <p:nvPr/>
-        </p:nvSpPr>
-        <p:spPr>
-          <a:xfrm>
-            <a:off x="548640" y="2606040"/>
-            <a:ext cx="11094415" cy="1097280"/>
-          </a:xfrm>
-          <a:prstGeom prst="roundRect">
-            <a:avLst>
-              <a:gd name="adj" fmla="val 10000"/>
-            </a:avLst>
-          </a:prstGeom>
-          <a:solidFill>
-            <a:srgbClr val="E7F0F7"/>
-          </a:solidFill>
-          <a:ln w="12700">
-            <a:solidFill>
-              <a:srgbClr val="E7F0F7"/>
-            </a:solidFill>
-            <a:prstDash val="solid"/>
-          </a:ln>
-        </p:spPr>
-      </p:sp>
-      <p:sp>
-        <p:nvSpPr>
-          <p:cNvPr id="10" name="Shape 7"/>
-          <p:cNvSpPr/>
-          <p:nvPr/>
-        </p:nvSpPr>
-        <p:spPr>
-          <a:xfrm>
-            <a:off x="777240" y="2862072"/>
-            <a:ext cx="594360" cy="594360"/>
-          </a:xfrm>
-          <a:prstGeom prst="ellipse">
-            <a:avLst/>
-          </a:prstGeom>
-          <a:solidFill>
-            <a:srgbClr val="003C6C"/>
-          </a:solidFill>
-          <a:ln w="12700">
-            <a:solidFill>
-              <a:srgbClr val="003C6C"/>
-            </a:solidFill>
-            <a:prstDash val="solid"/>
-          </a:ln>
-        </p:spPr>
-      </p:sp>
-      <p:pic>
-        <p:nvPicPr>
-          <p:cNvPr id="11" name="Image 1" descr="preencoded.png">    </p:cNvPr>
-          <p:cNvPicPr>
-            <a:picLocks noChangeAspect="1"/>
-          </p:cNvPicPr>
-          <p:nvPr/>
-        </p:nvPicPr>
-        <p:blipFill>
-          <a:blip r:embed="rId2"/>
-          <a:stretch>
-            <a:fillRect/>
-          </a:stretch>
-        </p:blipFill>
-        <p:spPr>
-          <a:xfrm>
-            <a:off x="931774" y="3016606"/>
-            <a:ext cx="285293" cy="285293"/>
-          </a:xfrm>
-          <a:prstGeom prst="rect">
-            <a:avLst/>
-          </a:prstGeom>
-        </p:spPr>
-      </p:pic>
-      <p:sp>
-        <p:nvSpPr>
-          <p:cNvPr id="12" name="Text 8"/>
-          <p:cNvSpPr txBox="1"/>
-          <p:nvPr/>
-        </p:nvSpPr>
-        <p:spPr>
-          <a:xfrm>
-            <a:off x="1600200" y="2743200"/>
-            <a:ext cx="9814255" cy="365760"/>
-          </a:xfrm>
-          <a:prstGeom prst="rect">
-            <a:avLst/>
-          </a:prstGeom>
-          <a:noFill/>
-          <a:ln/>
-        </p:spPr>
-        <p:txBody>
-          <a:bodyPr wrap="square" lIns="0" tIns="0" rIns="0" bIns="0" rtlCol="0" anchor="t"/>
-          <a:lstStyle/>
-          <a:p>
-            <a:pPr indent="0" marL="0">
-              <a:buNone/>
-            </a:pPr>
-            <a:r>
-              <a:rPr lang="en-US" sz="1700" b="1" dirty="0">
-                <a:solidFill>
-                  <a:srgbClr val="003C6C"/>
-                </a:solidFill>
-                <a:latin typeface="Calibri" pitchFamily="34" charset="0"/>
-                <a:ea typeface="Calibri" pitchFamily="34" charset="-122"/>
-                <a:cs typeface="Calibri" pitchFamily="34" charset="-120"/>
-              </a:rPr>
-              <a:t>Per-haplotype identity alongside coverage</a:t>
-            </a:r>
-            <a:endParaRPr lang="en-US" sz="1700" dirty="0"/>
-          </a:p>
-        </p:txBody>
-      </p:sp>
-      <p:sp>
-        <p:nvSpPr>
-          <p:cNvPr id="13" name="Text 9"/>
-          <p:cNvSpPr txBox="1"/>
-          <p:nvPr/>
-        </p:nvSpPr>
-        <p:spPr>
-          <a:xfrm>
-            <a:off x="1600200" y="3108960"/>
-            <a:ext cx="9814255" cy="594360"/>
-          </a:xfrm>
-          <a:prstGeom prst="rect">
-            <a:avLst/>
-          </a:prstGeom>
-          <a:noFill/>
-          <a:ln/>
-        </p:spPr>
-        <p:txBody>
-          <a:bodyPr wrap="square" lIns="0" tIns="0" rIns="0" bIns="0" rtlCol="0" anchor="t"/>
-          <a:lstStyle/>
-          <a:p>
-            <a:pPr indent="0" marL="0">
-              <a:buNone/>
-            </a:pPr>
-            <a:r>
-              <a:rPr lang="en-US" sz="1350" dirty="0">
-                <a:solidFill>
-                  <a:srgbClr val="18293B"/>
-                </a:solidFill>
-                <a:latin typeface="Calibri" pitchFamily="34" charset="0"/>
-                <a:ea typeface="Calibri" pitchFamily="34" charset="-122"/>
-                <a:cs typeface="Calibri" pitchFamily="34" charset="-120"/>
-              </a:rPr>
-              <a:t>Parses vg's cs:Z string per node; one pass scores all 464 haplotypes. Found and fixed a bug where anchors were estimated proportionally because the parser looked for cg:Z, which vg never emits.</a:t>
-            </a:r>
-            <a:endParaRPr lang="en-US" sz="1350" dirty="0"/>
-          </a:p>
-        </p:txBody>
-      </p:sp>
-      <p:sp>
-        <p:nvSpPr>
-          <p:cNvPr id="14" name="Shape 10"/>
-          <p:cNvSpPr/>
-          <p:nvPr/>
-        </p:nvSpPr>
-        <p:spPr>
-          <a:xfrm>
-            <a:off x="548640" y="3840480"/>
-            <a:ext cx="11094415" cy="1097280"/>
-          </a:xfrm>
-          <a:prstGeom prst="roundRect">
-            <a:avLst>
-              <a:gd name="adj" fmla="val 10000"/>
-            </a:avLst>
-          </a:prstGeom>
-          <a:solidFill>
-            <a:srgbClr val="F1F4F8"/>
-          </a:solidFill>
-          <a:ln w="12700">
-            <a:solidFill>
-              <a:srgbClr val="F1F4F8"/>
-            </a:solidFill>
-            <a:prstDash val="solid"/>
-          </a:ln>
-        </p:spPr>
-      </p:sp>
-      <p:sp>
-        <p:nvSpPr>
-          <p:cNvPr id="15" name="Shape 11"/>
-          <p:cNvSpPr/>
-          <p:nvPr/>
-        </p:nvSpPr>
-        <p:spPr>
-          <a:xfrm>
-            <a:off x="777240" y="4096512"/>
-            <a:ext cx="594360" cy="594360"/>
-          </a:xfrm>
-          <a:prstGeom prst="ellipse">
-            <a:avLst/>
-          </a:prstGeom>
-          <a:solidFill>
-            <a:srgbClr val="003C6C"/>
-          </a:solidFill>
-          <a:ln w="12700">
-            <a:solidFill>
-              <a:srgbClr val="003C6C"/>
-            </a:solidFill>
-            <a:prstDash val="solid"/>
-          </a:ln>
-        </p:spPr>
-      </p:sp>
-      <p:pic>
-        <p:nvPicPr>
-          <p:cNvPr id="16" name="Image 2" descr="preencoded.png">    </p:cNvPr>
-          <p:cNvPicPr>
-            <a:picLocks noChangeAspect="1"/>
-          </p:cNvPicPr>
-          <p:nvPr/>
-        </p:nvPicPr>
-        <p:blipFill>
-          <a:blip r:embed="rId3"/>
-          <a:stretch>
-            <a:fillRect/>
-          </a:stretch>
-        </p:blipFill>
-        <p:spPr>
-          <a:xfrm>
-            <a:off x="931774" y="4251046"/>
-            <a:ext cx="285293" cy="285293"/>
-          </a:xfrm>
-          <a:prstGeom prst="rect">
-            <a:avLst/>
-          </a:prstGeom>
-        </p:spPr>
-      </p:pic>
-      <p:sp>
-        <p:nvSpPr>
-          <p:cNvPr id="17" name="Text 12"/>
-          <p:cNvSpPr txBox="1"/>
-          <p:nvPr/>
-        </p:nvSpPr>
-        <p:spPr>
-          <a:xfrm>
-            <a:off x="1600200" y="3977640"/>
-            <a:ext cx="9814255" cy="365760"/>
-          </a:xfrm>
-          <a:prstGeom prst="rect">
-            <a:avLst/>
-          </a:prstGeom>
-          <a:noFill/>
-          <a:ln/>
-        </p:spPr>
-        <p:txBody>
-          <a:bodyPr wrap="square" lIns="0" tIns="0" rIns="0" bIns="0" rtlCol="0" anchor="t"/>
-          <a:lstStyle/>
-          <a:p>
-            <a:pPr indent="0" marL="0">
-              <a:buNone/>
-            </a:pPr>
-            <a:r>
-              <a:rPr lang="en-US" sz="1700" b="1" dirty="0">
-                <a:solidFill>
-                  <a:srgbClr val="003C6C"/>
-                </a:solidFill>
-                <a:latin typeface="Calibri" pitchFamily="34" charset="0"/>
-                <a:ea typeface="Calibri" pitchFamily="34" charset="-122"/>
-                <a:cs typeface="Calibri" pitchFamily="34" charset="-120"/>
-              </a:rPr>
-              <a:t>Concurrency</a:t>
-            </a:r>
-            <a:endParaRPr lang="en-US" sz="1700" dirty="0"/>
-          </a:p>
-        </p:txBody>
-      </p:sp>
-      <p:sp>
-        <p:nvSpPr>
-          <p:cNvPr id="18" name="Text 13"/>
-          <p:cNvSpPr txBox="1"/>
-          <p:nvPr/>
-        </p:nvSpPr>
-        <p:spPr>
-          <a:xfrm>
-            <a:off x="1600200" y="4343400"/>
-            <a:ext cx="9814255" cy="594360"/>
-          </a:xfrm>
-          <a:prstGeom prst="rect">
-            <a:avLst/>
-          </a:prstGeom>
-          <a:noFill/>
-          <a:ln/>
-        </p:spPr>
-        <p:txBody>
-          <a:bodyPr wrap="square" lIns="0" tIns="0" rIns="0" bIns="0" rtlCol="0" anchor="t"/>
-          <a:lstStyle/>
-          <a:p>
-            <a:pPr indent="0" marL="0">
-              <a:buNone/>
-            </a:pPr>
-            <a:r>
-              <a:rPr lang="en-US" sz="1350" dirty="0">
-                <a:solidFill>
-                  <a:srgbClr val="18293B"/>
-                </a:solidFill>
-                <a:latin typeface="Calibri" pitchFamily="34" charset="0"/>
-                <a:ea typeface="Calibri" pitchFamily="34" charset="-122"/>
-                <a:cs typeface="Calibri" pitchFamily="34" charset="-120"/>
-              </a:rPr>
-              <a:t>Thread-safety audit of FastLocate / tag arrays / trace path, GIL released on read-only bindings, global lock dropped: 6.3 to 60.3 queries/s from 1 to 8 threads (9.6x).</a:t>
-            </a:r>
-            <a:endParaRPr lang="en-US" sz="1350" dirty="0"/>
-          </a:p>
-        </p:txBody>
-      </p:sp>
-      <p:sp>
-        <p:nvSpPr>
-          <p:cNvPr id="19" name="Shape 14"/>
-          <p:cNvSpPr/>
-          <p:nvPr/>
-        </p:nvSpPr>
-        <p:spPr>
-          <a:xfrm>
-            <a:off x="548640" y="5074920"/>
-            <a:ext cx="11094415" cy="1097280"/>
-          </a:xfrm>
-          <a:prstGeom prst="roundRect">
-            <a:avLst>
-              <a:gd name="adj" fmla="val 10000"/>
-            </a:avLst>
-          </a:prstGeom>
-          <a:solidFill>
-            <a:srgbClr val="E7F0F7"/>
-          </a:solidFill>
-          <a:ln w="12700">
-            <a:solidFill>
-              <a:srgbClr val="E7F0F7"/>
-            </a:solidFill>
-            <a:prstDash val="solid"/>
-          </a:ln>
-        </p:spPr>
-      </p:sp>
-      <p:sp>
-        <p:nvSpPr>
-          <p:cNvPr id="20" name="Shape 15"/>
-          <p:cNvSpPr/>
-          <p:nvPr/>
-        </p:nvSpPr>
-        <p:spPr>
-          <a:xfrm>
-            <a:off x="777240" y="5330952"/>
-            <a:ext cx="594360" cy="594360"/>
-          </a:xfrm>
-          <a:prstGeom prst="ellipse">
-            <a:avLst/>
-          </a:prstGeom>
-          <a:solidFill>
-            <a:srgbClr val="003C6C"/>
-          </a:solidFill>
-          <a:ln w="12700">
-            <a:solidFill>
-              <a:srgbClr val="003C6C"/>
-            </a:solidFill>
-            <a:prstDash val="solid"/>
-          </a:ln>
-        </p:spPr>
-      </p:sp>
-      <p:pic>
-        <p:nvPicPr>
-          <p:cNvPr id="21" name="Image 3" descr="preencoded.png">    </p:cNvPr>
-          <p:cNvPicPr>
-            <a:picLocks noChangeAspect="1"/>
-          </p:cNvPicPr>
-          <p:nvPr/>
-        </p:nvPicPr>
-        <p:blipFill>
-          <a:blip r:embed="rId4"/>
-          <a:stretch>
-            <a:fillRect/>
-          </a:stretch>
-        </p:blipFill>
-        <p:spPr>
-          <a:xfrm>
-            <a:off x="931774" y="5485486"/>
-            <a:ext cx="285293" cy="285293"/>
-          </a:xfrm>
-          <a:prstGeom prst="rect">
-            <a:avLst/>
-          </a:prstGeom>
-        </p:spPr>
-      </p:pic>
-      <p:sp>
-        <p:nvSpPr>
-          <p:cNvPr id="22" name="Text 16"/>
-          <p:cNvSpPr txBox="1"/>
-          <p:nvPr/>
-        </p:nvSpPr>
-        <p:spPr>
-          <a:xfrm>
-            <a:off x="1600200" y="5212080"/>
-            <a:ext cx="9814255" cy="365760"/>
-          </a:xfrm>
-          <a:prstGeom prst="rect">
-            <a:avLst/>
-          </a:prstGeom>
-          <a:noFill/>
-          <a:ln/>
-        </p:spPr>
-        <p:txBody>
-          <a:bodyPr wrap="square" lIns="0" tIns="0" rIns="0" bIns="0" rtlCol="0" anchor="t"/>
-          <a:lstStyle/>
-          <a:p>
-            <a:pPr indent="0" marL="0">
-              <a:buNone/>
-            </a:pPr>
-            <a:r>
-              <a:rPr lang="en-US" sz="1700" b="1" dirty="0">
-                <a:solidFill>
-                  <a:srgbClr val="003C6C"/>
-                </a:solidFill>
-                <a:latin typeface="Calibri" pitchFamily="34" charset="0"/>
-                <a:ea typeface="Calibri" pitchFamily="34" charset="-122"/>
-                <a:cs typeface="Calibri" pitchFamily="34" charset="-120"/>
-              </a:rPr>
-              <a:t>Candidate discovery and the scored picker</a:t>
-            </a:r>
-            <a:endParaRPr lang="en-US" sz="1700" dirty="0"/>
-          </a:p>
-        </p:txBody>
-      </p:sp>
-      <p:sp>
-        <p:nvSpPr>
-          <p:cNvPr id="23" name="Text 17"/>
-          <p:cNvSpPr txBox="1"/>
-          <p:nvPr/>
-        </p:nvSpPr>
-        <p:spPr>
-          <a:xfrm>
-            <a:off x="1600200" y="5577840"/>
-            <a:ext cx="9814255" cy="594360"/>
-          </a:xfrm>
-          <a:prstGeom prst="rect">
-            <a:avLst/>
-          </a:prstGeom>
-          <a:noFill/>
-          <a:ln/>
-        </p:spPr>
-        <p:txBody>
-          <a:bodyPr wrap="square" lIns="0" tIns="0" rIns="0" bIns="0" rtlCol="0" anchor="t"/>
-          <a:lstStyle/>
-          <a:p>
-            <a:pPr indent="0" marL="0">
-              <a:buNone/>
-            </a:pPr>
-            <a:r>
-              <a:rPr lang="en-US" sz="1350" dirty="0">
-                <a:solidFill>
-                  <a:srgbClr val="18293B"/>
-                </a:solidFill>
-                <a:latin typeface="Calibri" pitchFamily="34" charset="0"/>
-                <a:ea typeface="Calibri" pitchFamily="34" charset="-122"/>
-                <a:cs typeface="Calibri" pitchFamily="34" charset="-120"/>
-              </a:rPr>
-              <a:t>Exhaustive discovery took 1 Mb completeness from 2.9% to 93.1% and made it 2x faster; the scored reachables path answers a 100 kb region in 1.28 s instead of 29.5 s.</a:t>
-            </a:r>
-            <a:endParaRPr lang="en-US" sz="1350" dirty="0"/>
-          </a:p>
-        </p:txBody>
-      </p:sp>
     </p:spTree>
   </p:cSld>
   <p:clrMapOvr>
@@ -3664,8 +2866,8 @@
         </p:nvSpPr>
         <p:spPr>
           <a:xfrm>
-            <a:off x="548640" y="384048"/>
-            <a:ext cx="11094415" cy="685800"/>
+            <a:off x="457200" y="274320"/>
+            <a:ext cx="11277295" cy="640080"/>
           </a:xfrm>
           <a:prstGeom prst="rect">
             <a:avLst/>
@@ -3681,7 +2883,7 @@
               <a:buNone/>
             </a:pPr>
             <a:r>
-              <a:rPr lang="en-US" sz="3200" b="1" dirty="0">
+              <a:rPr lang="en-US" sz="3000" b="1" dirty="0">
                 <a:solidFill>
                   <a:srgbClr val="003C6C"/>
                 </a:solidFill>
@@ -3689,9 +2891,9 @@
                 <a:ea typeface="Calibri" pitchFamily="34" charset="-122"/>
                 <a:cs typeface="Calibri" pitchFamily="34" charset="-120"/>
               </a:rPr>
-              <a:t>Where the numbers are</a:t>
+              <a:t>Convert coordinates between any two of 466 assemblies</a:t>
             </a:r>
-            <a:endParaRPr lang="en-US" sz="3200" dirty="0"/>
+            <a:endParaRPr lang="en-US" sz="3000" dirty="0"/>
           </a:p>
         </p:txBody>
       </p:sp>
@@ -3703,7 +2905,7 @@
         </p:nvSpPr>
         <p:spPr>
           <a:xfrm>
-            <a:off x="11277295" y="6446520"/>
+            <a:off x="11368735" y="6492240"/>
             <a:ext cx="457200" cy="274320"/>
           </a:xfrm>
           <a:prstGeom prst="rect">
@@ -3734,48 +2936,118 @@
           </a:p>
         </p:txBody>
       </p:sp>
-      <p:graphicFrame>
-        <p:nvGraphicFramePr>
-          <p:cNvPr id="4" name="Chart 0" descr=""/>
-          <p:cNvGraphicFramePr/>
-          <p:nvPr/>
-        </p:nvGraphicFramePr>
-        <p:xfrm>
-          <a:off x="548640" y="1280160"/>
-          <a:ext cx="5577840" cy="4023360"/>
-        </p:xfrm>
-        <a:graphic xmlns:a="http://schemas.openxmlformats.org/drawingml/2006/main">
-          <a:graphicData uri="http://schemas.openxmlformats.org/drawingml/2006/chart">
-            <c:chart xmlns:c="http://schemas.openxmlformats.org/drawingml/2006/chart" r:id="rId1"/>
-          </a:graphicData>
-        </a:graphic>
-      </p:graphicFrame>
-      <p:graphicFrame>
-        <p:nvGraphicFramePr>
-          <p:cNvPr id="5" name="Chart 1" descr=""/>
-          <p:cNvGraphicFramePr/>
-          <p:nvPr/>
-        </p:nvGraphicFramePr>
-        <p:xfrm>
-          <a:off x="6400800" y="1280160"/>
-          <a:ext cx="5242255" cy="4023360"/>
-        </p:xfrm>
-        <a:graphic xmlns:a="http://schemas.openxmlformats.org/drawingml/2006/main">
-          <a:graphicData uri="http://schemas.openxmlformats.org/drawingml/2006/chart">
-            <c:chart xmlns:c="http://schemas.openxmlformats.org/drawingml/2006/chart" r:id="rId2"/>
-          </a:graphicData>
-        </a:graphic>
-      </p:graphicFrame>
-      <p:sp>
-        <p:nvSpPr>
-          <p:cNvPr id="6" name="Text 2"/>
+      <p:sp>
+        <p:nvSpPr>
+          <p:cNvPr id="4" name="Shape 2"/>
+          <p:cNvSpPr/>
+          <p:nvPr/>
+        </p:nvSpPr>
+        <p:spPr>
+          <a:xfrm>
+            <a:off x="1103224" y="1051560"/>
+            <a:ext cx="9985248" cy="5303520"/>
+          </a:xfrm>
+          <a:prstGeom prst="roundRect">
+            <a:avLst>
+              <a:gd name="adj" fmla="val 2069"/>
+            </a:avLst>
+          </a:prstGeom>
+          <a:solidFill>
+            <a:srgbClr val="F1F4F8"/>
+          </a:solidFill>
+          <a:ln w="12700">
+            <a:solidFill>
+              <a:srgbClr val="F1F4F8"/>
+            </a:solidFill>
+            <a:prstDash val="solid"/>
+          </a:ln>
+        </p:spPr>
+      </p:sp>
+      <p:sp>
+        <p:nvSpPr>
+          <p:cNvPr id="5" name="Shape 3"/>
+          <p:cNvSpPr/>
+          <p:nvPr/>
+        </p:nvSpPr>
+        <p:spPr>
+          <a:xfrm>
+            <a:off x="1249528" y="1143000"/>
+            <a:ext cx="100584" cy="100584"/>
+          </a:xfrm>
+          <a:prstGeom prst="ellipse">
+            <a:avLst/>
+          </a:prstGeom>
+          <a:solidFill>
+            <a:srgbClr val="E4572E"/>
+          </a:solidFill>
+          <a:ln w="12700">
+            <a:solidFill>
+              <a:srgbClr val="E4572E"/>
+            </a:solidFill>
+            <a:prstDash val="solid"/>
+          </a:ln>
+        </p:spPr>
+      </p:sp>
+      <p:sp>
+        <p:nvSpPr>
+          <p:cNvPr id="6" name="Shape 4"/>
+          <p:cNvSpPr/>
+          <p:nvPr/>
+        </p:nvSpPr>
+        <p:spPr>
+          <a:xfrm>
+            <a:off x="1414120" y="1143000"/>
+            <a:ext cx="100584" cy="100584"/>
+          </a:xfrm>
+          <a:prstGeom prst="ellipse">
+            <a:avLst/>
+          </a:prstGeom>
+          <a:solidFill>
+            <a:srgbClr val="FDC700"/>
+          </a:solidFill>
+          <a:ln w="12700">
+            <a:solidFill>
+              <a:srgbClr val="FDC700"/>
+            </a:solidFill>
+            <a:prstDash val="solid"/>
+          </a:ln>
+        </p:spPr>
+      </p:sp>
+      <p:sp>
+        <p:nvSpPr>
+          <p:cNvPr id="7" name="Shape 5"/>
+          <p:cNvSpPr/>
+          <p:nvPr/>
+        </p:nvSpPr>
+        <p:spPr>
+          <a:xfrm>
+            <a:off x="1578712" y="1143000"/>
+            <a:ext cx="100584" cy="100584"/>
+          </a:xfrm>
+          <a:prstGeom prst="ellipse">
+            <a:avLst/>
+          </a:prstGeom>
+          <a:solidFill>
+            <a:srgbClr val="2E7D32"/>
+          </a:solidFill>
+          <a:ln w="12700">
+            <a:solidFill>
+              <a:srgbClr val="2E7D32"/>
+            </a:solidFill>
+            <a:prstDash val="solid"/>
+          </a:ln>
+        </p:spPr>
+      </p:sp>
+      <p:sp>
+        <p:nvSpPr>
+          <p:cNvPr id="8" name="Text 6"/>
           <p:cNvSpPr txBox="1"/>
           <p:nvPr/>
         </p:nvSpPr>
         <p:spPr>
           <a:xfrm>
-            <a:off x="548640" y="5532120"/>
-            <a:ext cx="11094415" cy="822960"/>
+            <a:off x="1880464" y="1078992"/>
+            <a:ext cx="3657600" cy="237744"/>
           </a:xfrm>
           <a:prstGeom prst="rect">
             <a:avLst/>
@@ -3784,27 +3056,51 @@
           <a:ln/>
         </p:spPr>
         <p:txBody>
-          <a:bodyPr wrap="square" lIns="0" tIns="0" rIns="0" bIns="0" rtlCol="0" anchor="t"/>
+          <a:bodyPr wrap="square" lIns="0" tIns="0" rIns="0" bIns="0" rtlCol="0" anchor="ctr"/>
           <a:lstStyle/>
           <a:p>
             <a:pPr indent="0" marL="0">
               <a:buNone/>
             </a:pPr>
             <a:r>
-              <a:rPr lang="en-US" sz="1400" dirty="0">
+              <a:rPr lang="en-US" sz="900" dirty="0">
                 <a:solidFill>
-                  <a:srgbClr val="18293B"/>
+                  <a:srgbClr val="5B6B7C"/>
                 </a:solidFill>
-                <a:latin typeface="Calibri" pitchFamily="34" charset="0"/>
-                <a:ea typeface="Calibri" pitchFamily="34" charset="-122"/>
-                <a:cs typeface="Calibri" pitchFamily="34" charset="-120"/>
+                <a:latin typeface="Courier New" pitchFamily="34" charset="0"/>
+                <a:ea typeface="Courier New" pitchFamily="34" charset="-122"/>
+                <a:cs typeface="Courier New" pitchFamily="34" charset="-120"/>
               </a:rPr>
-              <a:t>Chain generation through the HTTP API is linear at about 1.14 s/Mb (about 250 blocks/Mb). Whole chr10 would be ~150 s; all 466 haplotypes genome-wide ~19 days serialized. That number is why the bulk generator is next.</a:t>
+              <a:t>hgwdev-seeskand.gi.ucsc.edu</a:t>
             </a:r>
-            <a:endParaRPr lang="en-US" sz="1400" dirty="0"/>
-          </a:p>
-        </p:txBody>
-      </p:sp>
+            <a:endParaRPr lang="en-US" sz="900" dirty="0"/>
+          </a:p>
+        </p:txBody>
+      </p:sp>
+      <p:pic>
+        <p:nvPicPr>
+          <p:cNvPr id="9" name="Image 0" descr="/Users/seeskand/Documents/HPRC/2026/hprc_2026_poster/talk/figures/convert_page.png">    </p:cNvPr>
+          <p:cNvPicPr>
+            <a:picLocks noChangeAspect="1"/>
+          </p:cNvPicPr>
+          <p:nvPr/>
+        </p:nvPicPr>
+        <p:blipFill>
+          <a:blip r:embed="rId1"/>
+          <a:stretch>
+            <a:fillRect/>
+          </a:stretch>
+        </p:blipFill>
+        <p:spPr>
+          <a:xfrm>
+            <a:off x="1194664" y="1362456"/>
+            <a:ext cx="9802368" cy="4901184"/>
+          </a:xfrm>
+          <a:prstGeom prst="rect">
+            <a:avLst/>
+          </a:prstGeom>
+        </p:spPr>
+      </p:pic>
     </p:spTree>
   </p:cSld>
   <p:clrMapOvr>
@@ -3845,8 +3141,8 @@
         </p:nvSpPr>
         <p:spPr>
           <a:xfrm>
-            <a:off x="548640" y="384048"/>
-            <a:ext cx="11094415" cy="685800"/>
+            <a:off x="457200" y="274320"/>
+            <a:ext cx="11277295" cy="640080"/>
           </a:xfrm>
           <a:prstGeom prst="rect">
             <a:avLst/>
@@ -3862,7 +3158,7 @@
               <a:buNone/>
             </a:pPr>
             <a:r>
-              <a:rPr lang="en-US" sz="3200" b="1" dirty="0">
+              <a:rPr lang="en-US" sz="3000" b="1" dirty="0">
                 <a:solidFill>
                   <a:srgbClr val="003C6C"/>
                 </a:solidFill>
@@ -3870,9 +3166,9 @@
                 <a:ea typeface="Calibri" pitchFamily="34" charset="-122"/>
                 <a:cs typeface="Calibri" pitchFamily="34" charset="-120"/>
               </a:rPr>
-              <a:t>Open issues, and where I need input</a:t>
+              <a:t>Annotations follow you: a QuickLift chain built per request</a:t>
             </a:r>
-            <a:endParaRPr lang="en-US" sz="3200" dirty="0"/>
+            <a:endParaRPr lang="en-US" sz="3000" dirty="0"/>
           </a:p>
         </p:txBody>
       </p:sp>
@@ -3884,7 +3180,7 @@
         </p:nvSpPr>
         <p:spPr>
           <a:xfrm>
-            <a:off x="11277295" y="6446520"/>
+            <a:off x="11368735" y="6492240"/>
             <a:ext cx="457200" cy="274320"/>
           </a:xfrm>
           <a:prstGeom prst="rect">
@@ -3923,12 +3219,12 @@
         </p:nvSpPr>
         <p:spPr>
           <a:xfrm>
-            <a:off x="548640" y="1371600"/>
-            <a:ext cx="5364328" cy="4754880"/>
+            <a:off x="457200" y="1051560"/>
+            <a:ext cx="11277295" cy="2919826"/>
           </a:xfrm>
           <a:prstGeom prst="roundRect">
             <a:avLst>
-              <a:gd name="adj" fmla="val 2308"/>
+              <a:gd name="adj" fmla="val 3758"/>
             </a:avLst>
           </a:prstGeom>
           <a:solidFill>
@@ -3950,35 +3246,8 @@
         </p:nvSpPr>
         <p:spPr>
           <a:xfrm>
-            <a:off x="6278728" y="1371600"/>
-            <a:ext cx="5364328" cy="4754880"/>
-          </a:xfrm>
-          <a:prstGeom prst="roundRect">
-            <a:avLst>
-              <a:gd name="adj" fmla="val 2308"/>
-            </a:avLst>
-          </a:prstGeom>
-          <a:solidFill>
-            <a:srgbClr val="E7F0F7"/>
-          </a:solidFill>
-          <a:ln w="12700">
-            <a:solidFill>
-              <a:srgbClr val="E7F0F7"/>
-            </a:solidFill>
-            <a:prstDash val="solid"/>
-          </a:ln>
-        </p:spPr>
-      </p:sp>
-      <p:sp>
-        <p:nvSpPr>
-          <p:cNvPr id="6" name="Shape 4"/>
-          <p:cNvSpPr/>
-          <p:nvPr/>
-        </p:nvSpPr>
-        <p:spPr>
-          <a:xfrm>
-            <a:off x="822960" y="1600200"/>
-            <a:ext cx="548640" cy="548640"/>
+            <a:off x="603504" y="1143000"/>
+            <a:ext cx="100584" cy="100584"/>
           </a:xfrm>
           <a:prstGeom prst="ellipse">
             <a:avLst/>
@@ -3994,9 +3263,98 @@
           </a:ln>
         </p:spPr>
       </p:sp>
+      <p:sp>
+        <p:nvSpPr>
+          <p:cNvPr id="6" name="Shape 4"/>
+          <p:cNvSpPr/>
+          <p:nvPr/>
+        </p:nvSpPr>
+        <p:spPr>
+          <a:xfrm>
+            <a:off x="768096" y="1143000"/>
+            <a:ext cx="100584" cy="100584"/>
+          </a:xfrm>
+          <a:prstGeom prst="ellipse">
+            <a:avLst/>
+          </a:prstGeom>
+          <a:solidFill>
+            <a:srgbClr val="FDC700"/>
+          </a:solidFill>
+          <a:ln w="12700">
+            <a:solidFill>
+              <a:srgbClr val="FDC700"/>
+            </a:solidFill>
+            <a:prstDash val="solid"/>
+          </a:ln>
+        </p:spPr>
+      </p:sp>
+      <p:sp>
+        <p:nvSpPr>
+          <p:cNvPr id="7" name="Shape 5"/>
+          <p:cNvSpPr/>
+          <p:nvPr/>
+        </p:nvSpPr>
+        <p:spPr>
+          <a:xfrm>
+            <a:off x="932688" y="1143000"/>
+            <a:ext cx="100584" cy="100584"/>
+          </a:xfrm>
+          <a:prstGeom prst="ellipse">
+            <a:avLst/>
+          </a:prstGeom>
+          <a:solidFill>
+            <a:srgbClr val="2E7D32"/>
+          </a:solidFill>
+          <a:ln w="12700">
+            <a:solidFill>
+              <a:srgbClr val="2E7D32"/>
+            </a:solidFill>
+            <a:prstDash val="solid"/>
+          </a:ln>
+        </p:spPr>
+      </p:sp>
+      <p:sp>
+        <p:nvSpPr>
+          <p:cNvPr id="8" name="Text 6"/>
+          <p:cNvSpPr txBox="1"/>
+          <p:nvPr/>
+        </p:nvSpPr>
+        <p:spPr>
+          <a:xfrm>
+            <a:off x="1234440" y="1078992"/>
+            <a:ext cx="3657600" cy="237744"/>
+          </a:xfrm>
+          <a:prstGeom prst="rect">
+            <a:avLst/>
+          </a:prstGeom>
+          <a:noFill/>
+          <a:ln/>
+        </p:spPr>
+        <p:txBody>
+          <a:bodyPr wrap="square" lIns="0" tIns="0" rIns="0" bIns="0" rtlCol="0" anchor="ctr"/>
+          <a:lstStyle/>
+          <a:p>
+            <a:pPr indent="0" marL="0">
+              <a:buNone/>
+            </a:pPr>
+            <a:r>
+              <a:rPr lang="en-US" sz="900" dirty="0">
+                <a:solidFill>
+                  <a:srgbClr val="5B6B7C"/>
+                </a:solidFill>
+                <a:latin typeface="Courier New" pitchFamily="34" charset="0"/>
+                <a:ea typeface="Courier New" pitchFamily="34" charset="-122"/>
+                <a:cs typeface="Courier New" pitchFamily="34" charset="-120"/>
+              </a:rPr>
+              <a:t>hgwdev-seeskand.gi.ucsc.edu</a:t>
+            </a:r>
+            <a:endParaRPr lang="en-US" sz="900" dirty="0"/>
+          </a:p>
+        </p:txBody>
+      </p:sp>
       <p:pic>
         <p:nvPicPr>
-          <p:cNvPr id="7" name="Image 0" descr="preencoded.png">    </p:cNvPr>
+          <p:cNvPr id="9" name="Image 0" descr="/Users/seeskand/Documents/HPRC/2026/hprc_2026_poster/talk/figures/lifted_annotations.png">    </p:cNvPr>
           <p:cNvPicPr>
             <a:picLocks noChangeAspect="1"/>
           </p:cNvPicPr>
@@ -4010,395 +3368,14 @@
         </p:blipFill>
         <p:spPr>
           <a:xfrm>
-            <a:off x="965606" y="1742846"/>
-            <a:ext cx="263347" cy="263347"/>
+            <a:off x="548640" y="1362456"/>
+            <a:ext cx="11094415" cy="2517490"/>
           </a:xfrm>
           <a:prstGeom prst="rect">
             <a:avLst/>
           </a:prstGeom>
         </p:spPr>
       </p:pic>
-      <p:sp>
-        <p:nvSpPr>
-          <p:cNvPr id="8" name="Text 5"/>
-          <p:cNvSpPr txBox="1"/>
-          <p:nvPr/>
-        </p:nvSpPr>
-        <p:spPr>
-          <a:xfrm>
-            <a:off x="1508760" y="1645920"/>
-            <a:ext cx="4175608" cy="457200"/>
-          </a:xfrm>
-          <a:prstGeom prst="rect">
-            <a:avLst/>
-          </a:prstGeom>
-          <a:noFill/>
-          <a:ln/>
-        </p:spPr>
-        <p:txBody>
-          <a:bodyPr wrap="square" lIns="0" tIns="0" rIns="0" bIns="0" rtlCol="0" anchor="t"/>
-          <a:lstStyle/>
-          <a:p>
-            <a:pPr indent="0" marL="0">
-              <a:buNone/>
-            </a:pPr>
-            <a:r>
-              <a:rPr lang="en-US" sz="1800" b="1" dirty="0">
-                <a:solidFill>
-                  <a:srgbClr val="003C6C"/>
-                </a:solidFill>
-                <a:latin typeface="Calibri" pitchFamily="34" charset="0"/>
-                <a:ea typeface="Calibri" pitchFamily="34" charset="-122"/>
-                <a:cs typeface="Calibri" pitchFamily="34" charset="-120"/>
-              </a:rPr>
-              <a:t>Known issues (mine to fix)</a:t>
-            </a:r>
-            <a:endParaRPr lang="en-US" sz="1800" dirty="0"/>
-          </a:p>
-        </p:txBody>
-      </p:sp>
-      <p:sp>
-        <p:nvSpPr>
-          <p:cNvPr id="9" name="Text 6"/>
-          <p:cNvSpPr txBox="1"/>
-          <p:nvPr/>
-        </p:nvSpPr>
-        <p:spPr>
-          <a:xfrm>
-            <a:off x="822960" y="2286000"/>
-            <a:ext cx="4815688" cy="3749040"/>
-          </a:xfrm>
-          <a:prstGeom prst="rect">
-            <a:avLst/>
-          </a:prstGeom>
-          <a:noFill/>
-          <a:ln/>
-        </p:spPr>
-        <p:txBody>
-          <a:bodyPr wrap="square" lIns="0" tIns="0" rIns="0" bIns="0" rtlCol="0" anchor="t"/>
-          <a:lstStyle/>
-          <a:p>
-            <a:pPr marL="177800" indent="-177800">
-              <a:spcAft>
-                <a:spcPts val="700"/>
-              </a:spcAft>
-              <a:buSzPct val="100000"/>
-              <a:buChar char="•"/>
-            </a:pPr>
-            <a:r>
-              <a:rPr lang="en-US" sz="1350" dirty="0">
-                <a:solidFill>
-                  <a:srgbClr val="18293B"/>
-                </a:solidFill>
-                <a:latin typeface="Calibri" pitchFamily="34" charset="0"/>
-                <a:ea typeface="Calibri" pitchFamily="34" charset="-122"/>
-                <a:cs typeface="Calibri" pitchFamily="34" charset="-120"/>
-              </a:rPr>
-              <a:t>Hub temp-file name is derived from the hub path, so a new conversion racing an extend beacon can splice a hub. Needs pid/mkstemp.</a:t>
-            </a:r>
-            <a:endParaRPr lang="en-US" sz="1350" dirty="0"/>
-          </a:p>
-          <a:p>
-            <a:pPr marL="177800" indent="-177800">
-              <a:spcAft>
-                <a:spcPts val="700"/>
-              </a:spcAft>
-              <a:buSzPct val="100000"/>
-              <a:buChar char="•"/>
-            </a:pPr>
-            <a:r>
-              <a:rPr lang="en-US" sz="1350" dirty="0">
-                <a:solidFill>
-                  <a:srgbClr val="18293B"/>
-                </a:solidFill>
-                <a:latin typeface="Calibri" pitchFamily="34" charset="0"/>
-                <a:ea typeface="Calibri" pitchFamily="34" charset="-122"/>
-                <a:cs typeface="Calibri" pitchFamily="34" charset="-120"/>
-              </a:rPr>
-              <a:t>extendChain has no server-side payload test; it triggers an ~11 s job.</a:t>
-            </a:r>
-            <a:endParaRPr lang="en-US" sz="1350" dirty="0"/>
-          </a:p>
-          <a:p>
-            <a:pPr marL="177800" indent="-177800">
-              <a:spcAft>
-                <a:spcPts val="700"/>
-              </a:spcAft>
-              <a:buSzPct val="100000"/>
-              <a:buChar char="•"/>
-            </a:pPr>
-            <a:r>
-              <a:rPr lang="en-US" sz="1350" dirty="0">
-                <a:solidFill>
-                  <a:srgbClr val="18293B"/>
-                </a:solidFill>
-                <a:latin typeface="Calibri" pitchFamily="34" charset="0"/>
-                <a:ea typeface="Calibri" pitchFamily="34" charset="-122"/>
-                <a:cs typeface="Calibri" pitchFamily="34" charset="-120"/>
-              </a:rPr>
-              <a:t>Trash volume: ~12 files per conversion, one unlink in the whole file.</a:t>
-            </a:r>
-            <a:endParaRPr lang="en-US" sz="1350" dirty="0"/>
-          </a:p>
-          <a:p>
-            <a:pPr marL="177800" indent="-177800">
-              <a:spcAft>
-                <a:spcPts val="700"/>
-              </a:spcAft>
-              <a:buSzPct val="100000"/>
-              <a:buChar char="•"/>
-            </a:pPr>
-            <a:r>
-              <a:rPr lang="en-US" sz="1350" dirty="0">
-                <a:solidFill>
-                  <a:srgbClr val="18293B"/>
-                </a:solidFill>
-                <a:latin typeface="Calibri" pitchFamily="34" charset="0"/>
-                <a:ea typeface="Calibri" pitchFamily="34" charset="-122"/>
-                <a:cs typeface="Calibri" pitchFamily="34" charset="-120"/>
-              </a:rPr>
-              <a:t>Wide segdup-dense intervals lose positions (46% recovered on 1q21.1).</a:t>
-            </a:r>
-            <a:endParaRPr lang="en-US" sz="1350" dirty="0"/>
-          </a:p>
-          <a:p>
-            <a:pPr marL="177800" indent="-177800">
-              <a:spcAft>
-                <a:spcPts val="700"/>
-              </a:spcAft>
-              <a:buSzPct val="100000"/>
-              <a:buChar char="•"/>
-            </a:pPr>
-            <a:r>
-              <a:rPr lang="en-US" sz="1350" dirty="0">
-                <a:solidFill>
-                  <a:srgbClr val="18293B"/>
-                </a:solidFill>
-                <a:latin typeface="Calibri" pitchFamily="34" charset="0"/>
-                <a:ea typeface="Calibri" pitchFamily="34" charset="-122"/>
-                <a:cs typeface="Calibri" pitchFamily="34" charset="-120"/>
-              </a:rPr>
-              <a:t>Backend nits: two subpath-offset notations, soft-clip identity denominator, warnings[].target rename.</a:t>
-            </a:r>
-            <a:endParaRPr lang="en-US" sz="1350" dirty="0"/>
-          </a:p>
-        </p:txBody>
-      </p:sp>
-      <p:sp>
-        <p:nvSpPr>
-          <p:cNvPr id="10" name="Shape 7"/>
-          <p:cNvSpPr/>
-          <p:nvPr/>
-        </p:nvSpPr>
-        <p:spPr>
-          <a:xfrm>
-            <a:off x="6553048" y="1600200"/>
-            <a:ext cx="548640" cy="548640"/>
-          </a:xfrm>
-          <a:prstGeom prst="ellipse">
-            <a:avLst/>
-          </a:prstGeom>
-          <a:solidFill>
-            <a:srgbClr val="003C6C"/>
-          </a:solidFill>
-          <a:ln w="12700">
-            <a:solidFill>
-              <a:srgbClr val="003C6C"/>
-            </a:solidFill>
-            <a:prstDash val="solid"/>
-          </a:ln>
-        </p:spPr>
-      </p:sp>
-      <p:pic>
-        <p:nvPicPr>
-          <p:cNvPr id="11" name="Image 1" descr="preencoded.png">    </p:cNvPr>
-          <p:cNvPicPr>
-            <a:picLocks noChangeAspect="1"/>
-          </p:cNvPicPr>
-          <p:nvPr/>
-        </p:nvPicPr>
-        <p:blipFill>
-          <a:blip r:embed="rId2"/>
-          <a:stretch>
-            <a:fillRect/>
-          </a:stretch>
-        </p:blipFill>
-        <p:spPr>
-          <a:xfrm>
-            <a:off x="6695694" y="1742846"/>
-            <a:ext cx="263347" cy="263347"/>
-          </a:xfrm>
-          <a:prstGeom prst="rect">
-            <a:avLst/>
-          </a:prstGeom>
-        </p:spPr>
-      </p:pic>
-      <p:sp>
-        <p:nvSpPr>
-          <p:cNvPr id="12" name="Text 8"/>
-          <p:cNvSpPr txBox="1"/>
-          <p:nvPr/>
-        </p:nvSpPr>
-        <p:spPr>
-          <a:xfrm>
-            <a:off x="7238848" y="1645920"/>
-            <a:ext cx="4175608" cy="457200"/>
-          </a:xfrm>
-          <a:prstGeom prst="rect">
-            <a:avLst/>
-          </a:prstGeom>
-          <a:noFill/>
-          <a:ln/>
-        </p:spPr>
-        <p:txBody>
-          <a:bodyPr wrap="square" lIns="0" tIns="0" rIns="0" bIns="0" rtlCol="0" anchor="t"/>
-          <a:lstStyle/>
-          <a:p>
-            <a:pPr indent="0" marL="0">
-              <a:buNone/>
-            </a:pPr>
-            <a:r>
-              <a:rPr lang="en-US" sz="1800" b="1" dirty="0">
-                <a:solidFill>
-                  <a:srgbClr val="003C6C"/>
-                </a:solidFill>
-                <a:latin typeface="Calibri" pitchFamily="34" charset="0"/>
-                <a:ea typeface="Calibri" pitchFamily="34" charset="-122"/>
-                <a:cs typeface="Calibri" pitchFamily="34" charset="-120"/>
-              </a:rPr>
-              <a:t>Decisions I'd like from the group</a:t>
-            </a:r>
-            <a:endParaRPr lang="en-US" sz="1800" dirty="0"/>
-          </a:p>
-        </p:txBody>
-      </p:sp>
-      <p:sp>
-        <p:nvSpPr>
-          <p:cNvPr id="13" name="Text 9"/>
-          <p:cNvSpPr txBox="1"/>
-          <p:nvPr/>
-        </p:nvSpPr>
-        <p:spPr>
-          <a:xfrm>
-            <a:off x="6553048" y="2286000"/>
-            <a:ext cx="4449928" cy="3749040"/>
-          </a:xfrm>
-          <a:prstGeom prst="rect">
-            <a:avLst/>
-          </a:prstGeom>
-          <a:noFill/>
-          <a:ln/>
-        </p:spPr>
-        <p:txBody>
-          <a:bodyPr wrap="square" lIns="0" tIns="0" rIns="0" bIns="0" rtlCol="0" anchor="t"/>
-          <a:lstStyle/>
-          <a:p>
-            <a:pPr marL="177800" indent="-177800">
-              <a:spcAft>
-                <a:spcPts val="700"/>
-              </a:spcAft>
-              <a:buSzPct val="100000"/>
-              <a:buChar char="•"/>
-            </a:pPr>
-            <a:r>
-              <a:rPr lang="en-US" sz="1350" dirty="0">
-                <a:solidFill>
-                  <a:srgbClr val="18293B"/>
-                </a:solidFill>
-                <a:latin typeface="Calibri" pitchFamily="34" charset="0"/>
-                <a:ea typeface="Calibri" pitchFamily="34" charset="-122"/>
-                <a:cs typeface="Calibri" pitchFamily="34" charset="-120"/>
-              </a:rPr>
-              <a:t>Sign-off on the one-line hdb.c change (hNibForChrom accepting hub db names). It is committed and widens a hot core path.</a:t>
-            </a:r>
-            <a:endParaRPr lang="en-US" sz="1350" dirty="0"/>
-          </a:p>
-          <a:p>
-            <a:pPr marL="177800" indent="-177800">
-              <a:spcAft>
-                <a:spcPts val="700"/>
-              </a:spcAft>
-              <a:buSzPct val="100000"/>
-              <a:buChar char="•"/>
-            </a:pPr>
-            <a:r>
-              <a:rPr lang="en-US" sz="1350" dirty="0">
-                <a:solidFill>
-                  <a:srgbClr val="18293B"/>
-                </a:solidFill>
-                <a:latin typeface="Calibri" pitchFamily="34" charset="0"/>
-                <a:ea typeface="Calibri" pitchFamily="34" charset="-122"/>
-                <a:cs typeface="Calibri" pitchFamily="34" charset="-120"/>
-              </a:rPr>
-              <a:t>Service concurrency: the browser team measured only 13% gain from parallel requests. Likely PANGENOME_COORD_SERIALIZE=1 or a stale liftover_ext.so on pancake. Can I redeploy?</a:t>
-            </a:r>
-            <a:endParaRPr lang="en-US" sz="1350" dirty="0"/>
-          </a:p>
-          <a:p>
-            <a:pPr marL="177800" indent="-177800">
-              <a:spcAft>
-                <a:spcPts val="700"/>
-              </a:spcAft>
-              <a:buSzPct val="100000"/>
-              <a:buChar char="•"/>
-            </a:pPr>
-            <a:r>
-              <a:rPr lang="en-US" sz="1350" dirty="0">
-                <a:solidFill>
-                  <a:srgbClr val="18293B"/>
-                </a:solidFill>
-                <a:latin typeface="Calibri" pitchFamily="34" charset="0"/>
-                <a:ea typeface="Calibri" pitchFamily="34" charset="-122"/>
-                <a:cs typeface="Calibri" pitchFamily="34" charset="-120"/>
-              </a:rPr>
-              <a:t>Persistent chain cache: trash sweeps chains after ~1 h, so nothing is shared across users. Ops decision more than code.</a:t>
-            </a:r>
-            <a:endParaRPr lang="en-US" sz="1350" dirty="0"/>
-          </a:p>
-          <a:p>
-            <a:pPr marL="177800" indent="-177800">
-              <a:spcAft>
-                <a:spcPts val="700"/>
-              </a:spcAft>
-              <a:buSzPct val="100000"/>
-              <a:buChar char="•"/>
-            </a:pPr>
-            <a:r>
-              <a:rPr lang="en-US" sz="1350" dirty="0">
-                <a:solidFill>
-                  <a:srgbClr val="18293B"/>
-                </a:solidFill>
-                <a:latin typeface="Calibri" pitchFamily="34" charset="0"/>
-                <a:ea typeface="Calibri" pitchFamily="34" charset="-122"/>
-                <a:cs typeface="Calibri" pitchFamily="34" charset="-120"/>
-              </a:rPr>
-              <a:t>Go/no-go on the bulk chain generator (direct path intersection) before the table build finishes.</a:t>
-            </a:r>
-            <a:endParaRPr lang="en-US" sz="1350" dirty="0"/>
-          </a:p>
-          <a:p>
-            <a:pPr marL="177800" indent="-177800">
-              <a:spcAft>
-                <a:spcPts val="700"/>
-              </a:spcAft>
-              <a:buSzPct val="100000"/>
-              <a:buChar char="•"/>
-            </a:pPr>
-            <a:r>
-              <a:rPr lang="en-US" sz="1350" dirty="0">
-                <a:solidFill>
-                  <a:srgbClr val="18293B"/>
-                </a:solidFill>
-                <a:latin typeface="Calibri" pitchFamily="34" charset="0"/>
-                <a:ea typeface="Calibri" pitchFamily="34" charset="-122"/>
-                <a:cs typeface="Calibri" pitchFamily="34" charset="-120"/>
-              </a:rPr>
-              <a:t>HPRC 2026: poster is done, and I have a 15-minute talk slot. Feedback on the deck welcome.</a:t>
-            </a:r>
-            <a:endParaRPr lang="en-US" sz="1350" dirty="0"/>
-          </a:p>
-        </p:txBody>
-      </p:sp>
     </p:spTree>
   </p:cSld>
   <p:clrMapOvr>
@@ -4439,8 +3416,8 @@
         </p:nvSpPr>
         <p:spPr>
           <a:xfrm>
-            <a:off x="548640" y="384048"/>
-            <a:ext cx="11094415" cy="685800"/>
+            <a:off x="457200" y="274320"/>
+            <a:ext cx="11277295" cy="640080"/>
           </a:xfrm>
           <a:prstGeom prst="rect">
             <a:avLst/>
@@ -4456,7 +3433,7 @@
               <a:buNone/>
             </a:pPr>
             <a:r>
-              <a:rPr lang="en-US" sz="3200" b="1" dirty="0">
+              <a:rPr lang="en-US" sz="3000" b="1" dirty="0">
                 <a:solidFill>
                   <a:srgbClr val="003C6C"/>
                 </a:solidFill>
@@ -4464,9 +3441,9 @@
                 <a:ea typeface="Calibri" pitchFamily="34" charset="-122"/>
                 <a:cs typeface="Calibri" pitchFamily="34" charset="-120"/>
               </a:rPr>
-              <a:t>September plan</a:t>
+              <a:t>Also inside the stock hgConvert</a:t>
             </a:r>
-            <a:endParaRPr lang="en-US" sz="3200" dirty="0"/>
+            <a:endParaRPr lang="en-US" sz="3000" dirty="0"/>
           </a:p>
         </p:txBody>
       </p:sp>
@@ -4478,7 +3455,7 @@
         </p:nvSpPr>
         <p:spPr>
           <a:xfrm>
-            <a:off x="11277295" y="6446520"/>
+            <a:off x="11368735" y="6492240"/>
             <a:ext cx="457200" cy="274320"/>
           </a:xfrm>
           <a:prstGeom prst="rect">
@@ -4517,12 +3494,12 @@
         </p:nvSpPr>
         <p:spPr>
           <a:xfrm>
-            <a:off x="548640" y="1463040"/>
-            <a:ext cx="2567864" cy="4206240"/>
+            <a:off x="1587956" y="1051560"/>
+            <a:ext cx="9015783" cy="5303520"/>
           </a:xfrm>
           <a:prstGeom prst="roundRect">
             <a:avLst>
-              <a:gd name="adj" fmla="val 4273"/>
+              <a:gd name="adj" fmla="val 2069"/>
             </a:avLst>
           </a:prstGeom>
           <a:solidFill>
@@ -4544,13 +3521,36 @@
         </p:nvSpPr>
         <p:spPr>
           <a:xfrm>
-            <a:off x="822960" y="1737360"/>
-            <a:ext cx="457200" cy="457200"/>
-          </a:xfrm>
-          <a:prstGeom prst="roundRect">
-            <a:avLst>
-              <a:gd name="adj" fmla="val 16000"/>
-            </a:avLst>
+            <a:off x="1734260" y="1143000"/>
+            <a:ext cx="100584" cy="100584"/>
+          </a:xfrm>
+          <a:prstGeom prst="ellipse">
+            <a:avLst/>
+          </a:prstGeom>
+          <a:solidFill>
+            <a:srgbClr val="E4572E"/>
+          </a:solidFill>
+          <a:ln w="12700">
+            <a:solidFill>
+              <a:srgbClr val="E4572E"/>
+            </a:solidFill>
+            <a:prstDash val="solid"/>
+          </a:ln>
+        </p:spPr>
+      </p:sp>
+      <p:sp>
+        <p:nvSpPr>
+          <p:cNvPr id="6" name="Shape 4"/>
+          <p:cNvSpPr/>
+          <p:nvPr/>
+        </p:nvSpPr>
+        <p:spPr>
+          <a:xfrm>
+            <a:off x="1898852" y="1143000"/>
+            <a:ext cx="100584" cy="100584"/>
+          </a:xfrm>
+          <a:prstGeom prst="ellipse">
+            <a:avLst/>
           </a:prstGeom>
           <a:solidFill>
             <a:srgbClr val="FDC700"/>
@@ -4565,14 +3565,39 @@
       </p:sp>
       <p:sp>
         <p:nvSpPr>
-          <p:cNvPr id="6" name="Text 4"/>
+          <p:cNvPr id="7" name="Shape 5"/>
+          <p:cNvSpPr/>
+          <p:nvPr/>
+        </p:nvSpPr>
+        <p:spPr>
+          <a:xfrm>
+            <a:off x="2063444" y="1143000"/>
+            <a:ext cx="100584" cy="100584"/>
+          </a:xfrm>
+          <a:prstGeom prst="ellipse">
+            <a:avLst/>
+          </a:prstGeom>
+          <a:solidFill>
+            <a:srgbClr val="2E7D32"/>
+          </a:solidFill>
+          <a:ln w="12700">
+            <a:solidFill>
+              <a:srgbClr val="2E7D32"/>
+            </a:solidFill>
+            <a:prstDash val="solid"/>
+          </a:ln>
+        </p:spPr>
+      </p:sp>
+      <p:sp>
+        <p:nvSpPr>
+          <p:cNvPr id="8" name="Text 6"/>
           <p:cNvSpPr txBox="1"/>
           <p:nvPr/>
         </p:nvSpPr>
         <p:spPr>
           <a:xfrm>
-            <a:off x="822960" y="1737360"/>
-            <a:ext cx="457200" cy="457200"/>
+            <a:off x="2365196" y="1078992"/>
+            <a:ext cx="3657600" cy="237744"/>
           </a:xfrm>
           <a:prstGeom prst="rect">
             <a:avLst/>
@@ -4582,52 +3607,108 @@
         </p:spPr>
         <p:txBody>
           <a:bodyPr wrap="square" lIns="0" tIns="0" rIns="0" bIns="0" rtlCol="0" anchor="ctr"/>
-          <a:lstStyle/>
-          <a:p>
-            <a:pPr algn="ctr" indent="0" marL="0">
-              <a:buNone/>
-            </a:pPr>
-            <a:r>
-              <a:rPr lang="en-US" sz="1600" b="1" dirty="0">
-                <a:solidFill>
-                  <a:srgbClr val="06294A"/>
-                </a:solidFill>
-                <a:latin typeface="Calibri" pitchFamily="34" charset="0"/>
-                <a:ea typeface="Calibri" pitchFamily="34" charset="-122"/>
-                <a:cs typeface="Calibri" pitchFamily="34" charset="-120"/>
-              </a:rPr>
-              <a:t>1</a:t>
-            </a:r>
-            <a:endParaRPr lang="en-US" sz="1600" dirty="0"/>
-          </a:p>
-        </p:txBody>
-      </p:sp>
-      <p:sp>
-        <p:nvSpPr>
-          <p:cNvPr id="7" name="Text 5"/>
-          <p:cNvSpPr txBox="1"/>
-          <p:nvPr/>
-        </p:nvSpPr>
-        <p:spPr>
-          <a:xfrm>
-            <a:off x="822960" y="2377440"/>
-            <a:ext cx="2019224" cy="731520"/>
-          </a:xfrm>
-          <a:prstGeom prst="rect">
-            <a:avLst/>
-          </a:prstGeom>
-          <a:noFill/>
-          <a:ln/>
-        </p:spPr>
-        <p:txBody>
-          <a:bodyPr wrap="square" lIns="0" tIns="0" rIns="0" bIns="0" rtlCol="0" anchor="t"/>
           <a:lstStyle/>
           <a:p>
             <a:pPr indent="0" marL="0">
               <a:buNone/>
             </a:pPr>
             <a:r>
-              <a:rPr lang="en-US" sz="1800" b="1" dirty="0">
+              <a:rPr lang="en-US" sz="900" dirty="0">
+                <a:solidFill>
+                  <a:srgbClr val="5B6B7C"/>
+                </a:solidFill>
+                <a:latin typeface="Courier New" pitchFamily="34" charset="0"/>
+                <a:ea typeface="Courier New" pitchFamily="34" charset="-122"/>
+                <a:cs typeface="Courier New" pitchFamily="34" charset="-120"/>
+              </a:rPr>
+              <a:t>hgwdev-seeskand.gi.ucsc.edu</a:t>
+            </a:r>
+            <a:endParaRPr lang="en-US" sz="900" dirty="0"/>
+          </a:p>
+        </p:txBody>
+      </p:sp>
+      <p:pic>
+        <p:nvPicPr>
+          <p:cNvPr id="9" name="Image 0" descr="/Users/seeskand/Documents/HPRC/2026/hprc_2026_poster/talk/figures/hgconvert_dropdown.png">    </p:cNvPr>
+          <p:cNvPicPr>
+            <a:picLocks noChangeAspect="1"/>
+          </p:cNvPicPr>
+          <p:nvPr/>
+        </p:nvPicPr>
+        <p:blipFill>
+          <a:blip r:embed="rId1"/>
+          <a:stretch>
+            <a:fillRect/>
+          </a:stretch>
+        </p:blipFill>
+        <p:spPr>
+          <a:xfrm>
+            <a:off x="1679396" y="1362456"/>
+            <a:ext cx="8832903" cy="4901184"/>
+          </a:xfrm>
+          <a:prstGeom prst="rect">
+            <a:avLst/>
+          </a:prstGeom>
+        </p:spPr>
+      </p:pic>
+    </p:spTree>
+  </p:cSld>
+  <p:clrMapOvr>
+    <a:masterClrMapping/>
+  </p:clrMapOvr>
+</p:sld>
+</file>
+
+<file path=ppt/slides/slide7.xml><?xml version="1.0" encoding="utf-8"?>
+<p:sld xmlns:a="http://schemas.openxmlformats.org/drawingml/2006/main" xmlns:r="http://schemas.openxmlformats.org/officeDocument/2006/relationships" xmlns:p="http://schemas.openxmlformats.org/presentationml/2006/main">
+  <p:cSld name="Slide 7">
+    <p:bg>
+      <p:bgPr>
+        <a:solidFill>
+          <a:srgbClr val="FFFFFF"/>
+        </a:solidFill>
+      </p:bgPr>
+    </p:bg>
+    <p:spTree>
+      <p:nvGrpSpPr>
+        <p:cNvPr id="1" name=""/>
+        <p:cNvGrpSpPr/>
+        <p:nvPr/>
+      </p:nvGrpSpPr>
+      <p:grpSpPr>
+        <a:xfrm>
+          <a:off x="0" y="0"/>
+          <a:ext cx="0" cy="0"/>
+          <a:chOff x="0" y="0"/>
+          <a:chExt cx="0" cy="0"/>
+        </a:xfrm>
+      </p:grpSpPr>
+      <p:sp>
+        <p:nvSpPr>
+          <p:cNvPr id="2" name="Text 0"/>
+          <p:cNvSpPr txBox="1"/>
+          <p:nvPr/>
+        </p:nvSpPr>
+        <p:spPr>
+          <a:xfrm>
+            <a:off x="457200" y="274320"/>
+            <a:ext cx="11277295" cy="640080"/>
+          </a:xfrm>
+          <a:prstGeom prst="rect">
+            <a:avLst/>
+          </a:prstGeom>
+          <a:noFill/>
+          <a:ln/>
+        </p:spPr>
+        <p:txBody>
+          <a:bodyPr wrap="square" lIns="0" tIns="0" rIns="0" bIns="0" rtlCol="0" anchor="ctr"/>
+          <a:lstStyle/>
+          <a:p>
+            <a:pPr indent="0" marL="0">
+              <a:buNone/>
+            </a:pPr>
+            <a:r>
+              <a:rPr lang="en-US" sz="3000" b="1" dirty="0">
                 <a:solidFill>
                   <a:srgbClr val="003C6C"/>
                 </a:solidFill>
@@ -4635,22 +3716,22 @@
                 <a:ea typeface="Calibri" pitchFamily="34" charset="-122"/>
                 <a:cs typeface="Calibri" pitchFamily="34" charset="-120"/>
               </a:rPr>
-              <a:t>Bulk chain generator</a:t>
+              <a:t>Numbers</a:t>
             </a:r>
-            <a:endParaRPr lang="en-US" sz="1800" dirty="0"/>
-          </a:p>
-        </p:txBody>
-      </p:sp>
-      <p:sp>
-        <p:nvSpPr>
-          <p:cNvPr id="8" name="Text 6"/>
+            <a:endParaRPr lang="en-US" sz="3000" dirty="0"/>
+          </a:p>
+        </p:txBody>
+      </p:sp>
+      <p:sp>
+        <p:nvSpPr>
+          <p:cNvPr id="3" name="Text 1"/>
           <p:cNvSpPr txBox="1"/>
           <p:nvPr/>
         </p:nvSpPr>
         <p:spPr>
           <a:xfrm>
-            <a:off x="822960" y="3108960"/>
-            <a:ext cx="2019224" cy="2377440"/>
+            <a:off x="11368735" y="6492240"/>
+            <a:ext cx="457200" cy="274320"/>
           </a:xfrm>
           <a:prstGeom prst="rect">
             <a:avLst/>
@@ -4659,14 +3740,199 @@
           <a:ln/>
         </p:spPr>
         <p:txBody>
-          <a:bodyPr wrap="square" lIns="0" tIns="0" rIns="0" bIns="0" rtlCol="0" anchor="t"/>
+          <a:bodyPr wrap="square" lIns="0" tIns="0" rIns="0" bIns="0" rtlCol="0" anchor="ctr"/>
+          <a:lstStyle/>
+          <a:p>
+            <a:pPr algn="r" indent="0" marL="0">
+              <a:buNone/>
+            </a:pPr>
+            <a:r>
+              <a:rPr lang="en-US" sz="1000" dirty="0">
+                <a:solidFill>
+                  <a:srgbClr val="9DB0C4"/>
+                </a:solidFill>
+                <a:latin typeface="Calibri" pitchFamily="34" charset="0"/>
+                <a:ea typeface="Calibri" pitchFamily="34" charset="-122"/>
+                <a:cs typeface="Calibri" pitchFamily="34" charset="-120"/>
+              </a:rPr>
+              <a:t>7</a:t>
+            </a:r>
+            <a:endParaRPr lang="en-US" sz="1000" dirty="0"/>
+          </a:p>
+        </p:txBody>
+      </p:sp>
+      <p:graphicFrame>
+        <p:nvGraphicFramePr>
+          <p:cNvPr id="4" name="Chart 0" descr=""/>
+          <p:cNvGraphicFramePr/>
+          <p:nvPr/>
+        </p:nvGraphicFramePr>
+        <p:xfrm>
+          <a:off x="457200" y="1188720"/>
+          <a:ext cx="5577840" cy="4937760"/>
+        </p:xfrm>
+        <a:graphic xmlns:a="http://schemas.openxmlformats.org/drawingml/2006/main">
+          <a:graphicData uri="http://schemas.openxmlformats.org/drawingml/2006/chart">
+            <c:chart xmlns:c="http://schemas.openxmlformats.org/drawingml/2006/chart" r:id="rId1"/>
+          </a:graphicData>
+        </a:graphic>
+      </p:graphicFrame>
+      <p:graphicFrame>
+        <p:nvGraphicFramePr>
+          <p:cNvPr id="5" name="Chart 1" descr=""/>
+          <p:cNvGraphicFramePr/>
+          <p:nvPr/>
+        </p:nvGraphicFramePr>
+        <p:xfrm>
+          <a:off x="6309360" y="1188720"/>
+          <a:ext cx="5425135" cy="4937760"/>
+        </p:xfrm>
+        <a:graphic xmlns:a="http://schemas.openxmlformats.org/drawingml/2006/main">
+          <a:graphicData uri="http://schemas.openxmlformats.org/drawingml/2006/chart">
+            <c:chart xmlns:c="http://schemas.openxmlformats.org/drawingml/2006/chart" r:id="rId2"/>
+          </a:graphicData>
+        </a:graphic>
+      </p:graphicFrame>
+    </p:spTree>
+  </p:cSld>
+  <p:clrMapOvr>
+    <a:masterClrMapping/>
+  </p:clrMapOvr>
+</p:sld>
+</file>
+
+<file path=ppt/slides/slide8.xml><?xml version="1.0" encoding="utf-8"?>
+<p:sld xmlns:a="http://schemas.openxmlformats.org/drawingml/2006/main" xmlns:r="http://schemas.openxmlformats.org/officeDocument/2006/relationships" xmlns:p="http://schemas.openxmlformats.org/presentationml/2006/main">
+  <p:cSld name="Slide 8">
+    <p:bg>
+      <p:bgPr>
+        <a:solidFill>
+          <a:srgbClr val="FFFFFF"/>
+        </a:solidFill>
+      </p:bgPr>
+    </p:bg>
+    <p:spTree>
+      <p:nvGrpSpPr>
+        <p:cNvPr id="1" name=""/>
+        <p:cNvGrpSpPr/>
+        <p:nvPr/>
+      </p:nvGrpSpPr>
+      <p:grpSpPr>
+        <a:xfrm>
+          <a:off x="0" y="0"/>
+          <a:ext cx="0" cy="0"/>
+          <a:chOff x="0" y="0"/>
+          <a:chExt cx="0" cy="0"/>
+        </a:xfrm>
+      </p:grpSpPr>
+      <p:sp>
+        <p:nvSpPr>
+          <p:cNvPr id="2" name="Text 0"/>
+          <p:cNvSpPr txBox="1"/>
+          <p:nvPr/>
+        </p:nvSpPr>
+        <p:spPr>
+          <a:xfrm>
+            <a:off x="457200" y="274320"/>
+            <a:ext cx="11277295" cy="640080"/>
+          </a:xfrm>
+          <a:prstGeom prst="rect">
+            <a:avLst/>
+          </a:prstGeom>
+          <a:noFill/>
+          <a:ln/>
+        </p:spPr>
+        <p:txBody>
+          <a:bodyPr wrap="square" lIns="0" tIns="0" rIns="0" bIns="0" rtlCol="0" anchor="ctr"/>
           <a:lstStyle/>
           <a:p>
             <a:pPr indent="0" marL="0">
               <a:buNone/>
             </a:pPr>
             <a:r>
-              <a:rPr lang="en-US" sz="1350" dirty="0">
+              <a:rPr lang="en-US" sz="3000" b="1" dirty="0">
+                <a:solidFill>
+                  <a:srgbClr val="003C6C"/>
+                </a:solidFill>
+                <a:latin typeface="Calibri" pitchFamily="34" charset="0"/>
+                <a:ea typeface="Calibri" pitchFamily="34" charset="-122"/>
+                <a:cs typeface="Calibri" pitchFamily="34" charset="-120"/>
+              </a:rPr>
+              <a:t>Next</a:t>
+            </a:r>
+            <a:endParaRPr lang="en-US" sz="3000" dirty="0"/>
+          </a:p>
+        </p:txBody>
+      </p:sp>
+      <p:sp>
+        <p:nvSpPr>
+          <p:cNvPr id="3" name="Text 1"/>
+          <p:cNvSpPr txBox="1"/>
+          <p:nvPr/>
+        </p:nvSpPr>
+        <p:spPr>
+          <a:xfrm>
+            <a:off x="11368735" y="6492240"/>
+            <a:ext cx="457200" cy="274320"/>
+          </a:xfrm>
+          <a:prstGeom prst="rect">
+            <a:avLst/>
+          </a:prstGeom>
+          <a:noFill/>
+          <a:ln/>
+        </p:spPr>
+        <p:txBody>
+          <a:bodyPr wrap="square" lIns="0" tIns="0" rIns="0" bIns="0" rtlCol="0" anchor="ctr"/>
+          <a:lstStyle/>
+          <a:p>
+            <a:pPr algn="r" indent="0" marL="0">
+              <a:buNone/>
+            </a:pPr>
+            <a:r>
+              <a:rPr lang="en-US" sz="1000" dirty="0">
+                <a:solidFill>
+                  <a:srgbClr val="9DB0C4"/>
+                </a:solidFill>
+                <a:latin typeface="Calibri" pitchFamily="34" charset="0"/>
+                <a:ea typeface="Calibri" pitchFamily="34" charset="-122"/>
+                <a:cs typeface="Calibri" pitchFamily="34" charset="-120"/>
+              </a:rPr>
+              <a:t>8</a:t>
+            </a:r>
+            <a:endParaRPr lang="en-US" sz="1000" dirty="0"/>
+          </a:p>
+        </p:txBody>
+      </p:sp>
+      <p:sp>
+        <p:nvSpPr>
+          <p:cNvPr id="4" name="Text 2"/>
+          <p:cNvSpPr txBox="1"/>
+          <p:nvPr/>
+        </p:nvSpPr>
+        <p:spPr>
+          <a:xfrm>
+            <a:off x="731520" y="1371600"/>
+            <a:ext cx="10728655" cy="4114800"/>
+          </a:xfrm>
+          <a:prstGeom prst="rect">
+            <a:avLst/>
+          </a:prstGeom>
+          <a:noFill/>
+          <a:ln/>
+        </p:spPr>
+        <p:txBody>
+          <a:bodyPr wrap="square" lIns="0" tIns="0" rIns="0" bIns="0" rtlCol="0" anchor="t"/>
+          <a:lstStyle/>
+          <a:p>
+            <a:pPr marL="228600" indent="-228600">
+              <a:spcAft>
+                <a:spcPts val="1600"/>
+              </a:spcAft>
+              <a:buSzPct val="100000"/>
+              <a:buChar char="•"/>
+            </a:pPr>
+            <a:r>
+              <a:rPr lang="en-US" sz="2400" dirty="0">
                 <a:solidFill>
                   <a:srgbClr val="18293B"/>
                 </a:solidFill>
@@ -4674,115 +3940,64 @@
                 <a:ea typeface="Calibri" pitchFamily="34" charset="-122"/>
                 <a:cs typeface="Calibri" pitchFamily="34" charset="-120"/>
               </a:rPr>
-              <a:t>Direct source/target path intersection, no r-index probing. Estimate ~4 min per chromosome at 32 threads, ~1.6 h genome-wide per target. Benchmark one chromosome pair first.</a:t>
+              <a:t>Fix the audit items (hub write race, extendChain test, trash cleanup)</a:t>
             </a:r>
-            <a:endParaRPr lang="en-US" sz="1350" dirty="0"/>
-          </a:p>
-        </p:txBody>
-      </p:sp>
-      <p:sp>
-        <p:nvSpPr>
-          <p:cNvPr id="9" name="Shape 7"/>
-          <p:cNvSpPr/>
-          <p:nvPr/>
-        </p:nvSpPr>
-        <p:spPr>
-          <a:xfrm>
-            <a:off x="3390824" y="1463040"/>
-            <a:ext cx="2567864" cy="4206240"/>
-          </a:xfrm>
-          <a:prstGeom prst="roundRect">
-            <a:avLst>
-              <a:gd name="adj" fmla="val 4273"/>
-            </a:avLst>
-          </a:prstGeom>
-          <a:solidFill>
-            <a:srgbClr val="F1F4F8"/>
-          </a:solidFill>
-          <a:ln w="12700">
-            <a:solidFill>
-              <a:srgbClr val="F1F4F8"/>
-            </a:solidFill>
-            <a:prstDash val="solid"/>
-          </a:ln>
-        </p:spPr>
-      </p:sp>
-      <p:sp>
-        <p:nvSpPr>
-          <p:cNvPr id="10" name="Shape 8"/>
-          <p:cNvSpPr/>
-          <p:nvPr/>
-        </p:nvSpPr>
-        <p:spPr>
-          <a:xfrm>
-            <a:off x="3665144" y="1737360"/>
-            <a:ext cx="457200" cy="457200"/>
-          </a:xfrm>
-          <a:prstGeom prst="roundRect">
-            <a:avLst>
-              <a:gd name="adj" fmla="val 16000"/>
-            </a:avLst>
-          </a:prstGeom>
-          <a:solidFill>
-            <a:srgbClr val="FDC700"/>
-          </a:solidFill>
-          <a:ln w="12700">
-            <a:solidFill>
-              <a:srgbClr val="FDC700"/>
-            </a:solidFill>
-            <a:prstDash val="solid"/>
-          </a:ln>
-        </p:spPr>
-      </p:sp>
-      <p:sp>
-        <p:nvSpPr>
-          <p:cNvPr id="11" name="Text 9"/>
-          <p:cNvSpPr txBox="1"/>
-          <p:nvPr/>
-        </p:nvSpPr>
-        <p:spPr>
-          <a:xfrm>
-            <a:off x="3665144" y="1737360"/>
-            <a:ext cx="457200" cy="457200"/>
-          </a:xfrm>
-          <a:prstGeom prst="rect">
-            <a:avLst/>
-          </a:prstGeom>
-          <a:noFill/>
-          <a:ln/>
-        </p:spPr>
-        <p:txBody>
-          <a:bodyPr wrap="square" lIns="0" tIns="0" rIns="0" bIns="0" rtlCol="0" anchor="ctr"/>
-          <a:lstStyle/>
-          <a:p>
-            <a:pPr algn="ctr" indent="0" marL="0">
-              <a:buNone/>
+            <a:endParaRPr lang="en-US" sz="2400" dirty="0"/>
+          </a:p>
+          <a:p>
+            <a:pPr marL="228600" indent="-228600">
+              <a:spcAft>
+                <a:spcPts val="1600"/>
+              </a:spcAft>
+              <a:buSzPct val="100000"/>
+              <a:buChar char="•"/>
             </a:pPr>
             <a:r>
-              <a:rPr lang="en-US" sz="1600" b="1" dirty="0">
+              <a:rPr lang="en-US" sz="2400" dirty="0">
                 <a:solidFill>
-                  <a:srgbClr val="06294A"/>
+                  <a:srgbClr val="18293B"/>
                 </a:solidFill>
                 <a:latin typeface="Calibri" pitchFamily="34" charset="0"/>
                 <a:ea typeface="Calibri" pitchFamily="34" charset="-122"/>
                 <a:cs typeface="Calibri" pitchFamily="34" charset="-120"/>
               </a:rPr>
-              <a:t>2</a:t>
+              <a:t>Deploy concurrency on the service; persistent chain cache if we want it</a:t>
             </a:r>
-            <a:endParaRPr lang="en-US" sz="1600" dirty="0"/>
-          </a:p>
-        </p:txBody>
-      </p:sp>
-      <p:sp>
-        <p:nvSpPr>
-          <p:cNvPr id="12" name="Text 10"/>
+            <a:endParaRPr lang="en-US" sz="2400" dirty="0"/>
+          </a:p>
+          <a:p>
+            <a:pPr marL="228600" indent="-228600">
+              <a:spcAft>
+                <a:spcPts val="1600"/>
+              </a:spcAft>
+              <a:buSzPct val="100000"/>
+              <a:buChar char="•"/>
+            </a:pPr>
+            <a:r>
+              <a:rPr lang="en-US" sz="2400" dirty="0">
+                <a:solidFill>
+                  <a:srgbClr val="18293B"/>
+                </a:solidFill>
+                <a:latin typeface="Calibri" pitchFamily="34" charset="0"/>
+                <a:ea typeface="Calibri" pitchFamily="34" charset="-122"/>
+                <a:cs typeface="Calibri" pitchFamily="34" charset="-120"/>
+              </a:rPr>
+              <a:t>HPRC 2026: poster done, 15-minute talk slot, record a 20 s demo</a:t>
+            </a:r>
+            <a:endParaRPr lang="en-US" sz="2400" dirty="0"/>
+          </a:p>
+        </p:txBody>
+      </p:sp>
+      <p:sp>
+        <p:nvSpPr>
+          <p:cNvPr id="5" name="Text 3"/>
           <p:cNvSpPr txBox="1"/>
           <p:nvPr/>
         </p:nvSpPr>
         <p:spPr>
           <a:xfrm>
-            <a:off x="3665144" y="2377440"/>
-            <a:ext cx="2019224" cy="731520"/>
+            <a:off x="731520" y="5669280"/>
+            <a:ext cx="10728655" cy="457200"/>
           </a:xfrm>
           <a:prstGeom prst="rect">
             <a:avLst/>
@@ -4791,14 +4006,14 @@
           <a:ln/>
         </p:spPr>
         <p:txBody>
-          <a:bodyPr wrap="square" lIns="0" tIns="0" rIns="0" bIns="0" rtlCol="0" anchor="t"/>
+          <a:bodyPr wrap="square" lIns="0" tIns="0" rIns="0" bIns="0" rtlCol="0" anchor="ctr"/>
           <a:lstStyle/>
           <a:p>
             <a:pPr indent="0" marL="0">
               <a:buNone/>
             </a:pPr>
             <a:r>
-              <a:rPr lang="en-US" sz="1800" b="1" dirty="0">
+              <a:rPr lang="en-US" sz="1800" i="1" dirty="0">
                 <a:solidFill>
                   <a:srgbClr val="003C6C"/>
                 </a:solidFill>
@@ -4806,429 +4021,9 @@
                 <a:ea typeface="Calibri" pitchFamily="34" charset="-122"/>
                 <a:cs typeface="Calibri" pitchFamily="34" charset="-120"/>
               </a:rPr>
-              <a:t>Fix the audit items</a:t>
+              <a:t>Need: sign-off on the one-line hdb.c change; OK to redeploy the service.</a:t>
             </a:r>
             <a:endParaRPr lang="en-US" sz="1800" dirty="0"/>
-          </a:p>
-        </p:txBody>
-      </p:sp>
-      <p:sp>
-        <p:nvSpPr>
-          <p:cNvPr id="13" name="Text 11"/>
-          <p:cNvSpPr txBox="1"/>
-          <p:nvPr/>
-        </p:nvSpPr>
-        <p:spPr>
-          <a:xfrm>
-            <a:off x="3665144" y="3108960"/>
-            <a:ext cx="2019224" cy="2377440"/>
-          </a:xfrm>
-          <a:prstGeom prst="rect">
-            <a:avLst/>
-          </a:prstGeom>
-          <a:noFill/>
-          <a:ln/>
-        </p:spPr>
-        <p:txBody>
-          <a:bodyPr wrap="square" lIns="0" tIns="0" rIns="0" bIns="0" rtlCol="0" anchor="t"/>
-          <a:lstStyle/>
-          <a:p>
-            <a:pPr indent="0" marL="0">
-              <a:buNone/>
-            </a:pPr>
-            <a:r>
-              <a:rPr lang="en-US" sz="1350" dirty="0">
-                <a:solidFill>
-                  <a:srgbClr val="18293B"/>
-                </a:solidFill>
-                <a:latin typeface="Calibri" pitchFamily="34" charset="0"/>
-                <a:ea typeface="Calibri" pitchFamily="34" charset="-122"/>
-                <a:cs typeface="Calibri" pitchFamily="34" charset="-120"/>
-              </a:rPr>
-              <a:t>Hub write race, extendChain test, trash cleanup, dead chainSpan field, subpath notation.</a:t>
-            </a:r>
-            <a:endParaRPr lang="en-US" sz="1350" dirty="0"/>
-          </a:p>
-        </p:txBody>
-      </p:sp>
-      <p:sp>
-        <p:nvSpPr>
-          <p:cNvPr id="14" name="Shape 12"/>
-          <p:cNvSpPr/>
-          <p:nvPr/>
-        </p:nvSpPr>
-        <p:spPr>
-          <a:xfrm>
-            <a:off x="6233008" y="1463040"/>
-            <a:ext cx="2567864" cy="4206240"/>
-          </a:xfrm>
-          <a:prstGeom prst="roundRect">
-            <a:avLst>
-              <a:gd name="adj" fmla="val 4273"/>
-            </a:avLst>
-          </a:prstGeom>
-          <a:solidFill>
-            <a:srgbClr val="F1F4F8"/>
-          </a:solidFill>
-          <a:ln w="12700">
-            <a:solidFill>
-              <a:srgbClr val="F1F4F8"/>
-            </a:solidFill>
-            <a:prstDash val="solid"/>
-          </a:ln>
-        </p:spPr>
-      </p:sp>
-      <p:sp>
-        <p:nvSpPr>
-          <p:cNvPr id="15" name="Shape 13"/>
-          <p:cNvSpPr/>
-          <p:nvPr/>
-        </p:nvSpPr>
-        <p:spPr>
-          <a:xfrm>
-            <a:off x="6507328" y="1737360"/>
-            <a:ext cx="457200" cy="457200"/>
-          </a:xfrm>
-          <a:prstGeom prst="roundRect">
-            <a:avLst>
-              <a:gd name="adj" fmla="val 16000"/>
-            </a:avLst>
-          </a:prstGeom>
-          <a:solidFill>
-            <a:srgbClr val="FDC700"/>
-          </a:solidFill>
-          <a:ln w="12700">
-            <a:solidFill>
-              <a:srgbClr val="FDC700"/>
-            </a:solidFill>
-            <a:prstDash val="solid"/>
-          </a:ln>
-        </p:spPr>
-      </p:sp>
-      <p:sp>
-        <p:nvSpPr>
-          <p:cNvPr id="16" name="Text 14"/>
-          <p:cNvSpPr txBox="1"/>
-          <p:nvPr/>
-        </p:nvSpPr>
-        <p:spPr>
-          <a:xfrm>
-            <a:off x="6507328" y="1737360"/>
-            <a:ext cx="457200" cy="457200"/>
-          </a:xfrm>
-          <a:prstGeom prst="rect">
-            <a:avLst/>
-          </a:prstGeom>
-          <a:noFill/>
-          <a:ln/>
-        </p:spPr>
-        <p:txBody>
-          <a:bodyPr wrap="square" lIns="0" tIns="0" rIns="0" bIns="0" rtlCol="0" anchor="ctr"/>
-          <a:lstStyle/>
-          <a:p>
-            <a:pPr algn="ctr" indent="0" marL="0">
-              <a:buNone/>
-            </a:pPr>
-            <a:r>
-              <a:rPr lang="en-US" sz="1600" b="1" dirty="0">
-                <a:solidFill>
-                  <a:srgbClr val="06294A"/>
-                </a:solidFill>
-                <a:latin typeface="Calibri" pitchFamily="34" charset="0"/>
-                <a:ea typeface="Calibri" pitchFamily="34" charset="-122"/>
-                <a:cs typeface="Calibri" pitchFamily="34" charset="-120"/>
-              </a:rPr>
-              <a:t>3</a:t>
-            </a:r>
-            <a:endParaRPr lang="en-US" sz="1600" dirty="0"/>
-          </a:p>
-        </p:txBody>
-      </p:sp>
-      <p:sp>
-        <p:nvSpPr>
-          <p:cNvPr id="17" name="Text 15"/>
-          <p:cNvSpPr txBox="1"/>
-          <p:nvPr/>
-        </p:nvSpPr>
-        <p:spPr>
-          <a:xfrm>
-            <a:off x="6507328" y="2377440"/>
-            <a:ext cx="2019224" cy="731520"/>
-          </a:xfrm>
-          <a:prstGeom prst="rect">
-            <a:avLst/>
-          </a:prstGeom>
-          <a:noFill/>
-          <a:ln/>
-        </p:spPr>
-        <p:txBody>
-          <a:bodyPr wrap="square" lIns="0" tIns="0" rIns="0" bIns="0" rtlCol="0" anchor="t"/>
-          <a:lstStyle/>
-          <a:p>
-            <a:pPr indent="0" marL="0">
-              <a:buNone/>
-            </a:pPr>
-            <a:r>
-              <a:rPr lang="en-US" sz="1800" b="1" dirty="0">
-                <a:solidFill>
-                  <a:srgbClr val="003C6C"/>
-                </a:solidFill>
-                <a:latin typeface="Calibri" pitchFamily="34" charset="0"/>
-                <a:ea typeface="Calibri" pitchFamily="34" charset="-122"/>
-                <a:cs typeface="Calibri" pitchFamily="34" charset="-120"/>
-              </a:rPr>
-              <a:t>Service deployment</a:t>
-            </a:r>
-            <a:endParaRPr lang="en-US" sz="1800" dirty="0"/>
-          </a:p>
-        </p:txBody>
-      </p:sp>
-      <p:sp>
-        <p:nvSpPr>
-          <p:cNvPr id="18" name="Text 16"/>
-          <p:cNvSpPr txBox="1"/>
-          <p:nvPr/>
-        </p:nvSpPr>
-        <p:spPr>
-          <a:xfrm>
-            <a:off x="6507328" y="3108960"/>
-            <a:ext cx="2019224" cy="2377440"/>
-          </a:xfrm>
-          <a:prstGeom prst="rect">
-            <a:avLst/>
-          </a:prstGeom>
-          <a:noFill/>
-          <a:ln/>
-        </p:spPr>
-        <p:txBody>
-          <a:bodyPr wrap="square" lIns="0" tIns="0" rIns="0" bIns="0" rtlCol="0" anchor="t"/>
-          <a:lstStyle/>
-          <a:p>
-            <a:pPr indent="0" marL="0">
-              <a:buNone/>
-            </a:pPr>
-            <a:r>
-              <a:rPr lang="en-US" sz="1350" dirty="0">
-                <a:solidFill>
-                  <a:srgbClr val="18293B"/>
-                </a:solidFill>
-                <a:latin typeface="Calibri" pitchFamily="34" charset="0"/>
-                <a:ea typeface="Calibri" pitchFamily="34" charset="-122"/>
-                <a:cs typeface="Calibri" pitchFamily="34" charset="-120"/>
-              </a:rPr>
-              <a:t>Confirm concurrency in production; persistent chain cache if approved.</a:t>
-            </a:r>
-            <a:endParaRPr lang="en-US" sz="1350" dirty="0"/>
-          </a:p>
-        </p:txBody>
-      </p:sp>
-      <p:sp>
-        <p:nvSpPr>
-          <p:cNvPr id="19" name="Shape 17"/>
-          <p:cNvSpPr/>
-          <p:nvPr/>
-        </p:nvSpPr>
-        <p:spPr>
-          <a:xfrm>
-            <a:off x="9075191" y="1463040"/>
-            <a:ext cx="2567864" cy="4206240"/>
-          </a:xfrm>
-          <a:prstGeom prst="roundRect">
-            <a:avLst>
-              <a:gd name="adj" fmla="val 4273"/>
-            </a:avLst>
-          </a:prstGeom>
-          <a:solidFill>
-            <a:srgbClr val="F1F4F8"/>
-          </a:solidFill>
-          <a:ln w="12700">
-            <a:solidFill>
-              <a:srgbClr val="F1F4F8"/>
-            </a:solidFill>
-            <a:prstDash val="solid"/>
-          </a:ln>
-        </p:spPr>
-      </p:sp>
-      <p:sp>
-        <p:nvSpPr>
-          <p:cNvPr id="20" name="Shape 18"/>
-          <p:cNvSpPr/>
-          <p:nvPr/>
-        </p:nvSpPr>
-        <p:spPr>
-          <a:xfrm>
-            <a:off x="9349511" y="1737360"/>
-            <a:ext cx="457200" cy="457200"/>
-          </a:xfrm>
-          <a:prstGeom prst="roundRect">
-            <a:avLst>
-              <a:gd name="adj" fmla="val 16000"/>
-            </a:avLst>
-          </a:prstGeom>
-          <a:solidFill>
-            <a:srgbClr val="FDC700"/>
-          </a:solidFill>
-          <a:ln w="12700">
-            <a:solidFill>
-              <a:srgbClr val="FDC700"/>
-            </a:solidFill>
-            <a:prstDash val="solid"/>
-          </a:ln>
-        </p:spPr>
-      </p:sp>
-      <p:sp>
-        <p:nvSpPr>
-          <p:cNvPr id="21" name="Text 19"/>
-          <p:cNvSpPr txBox="1"/>
-          <p:nvPr/>
-        </p:nvSpPr>
-        <p:spPr>
-          <a:xfrm>
-            <a:off x="9349511" y="1737360"/>
-            <a:ext cx="457200" cy="457200"/>
-          </a:xfrm>
-          <a:prstGeom prst="rect">
-            <a:avLst/>
-          </a:prstGeom>
-          <a:noFill/>
-          <a:ln/>
-        </p:spPr>
-        <p:txBody>
-          <a:bodyPr wrap="square" lIns="0" tIns="0" rIns="0" bIns="0" rtlCol="0" anchor="ctr"/>
-          <a:lstStyle/>
-          <a:p>
-            <a:pPr algn="ctr" indent="0" marL="0">
-              <a:buNone/>
-            </a:pPr>
-            <a:r>
-              <a:rPr lang="en-US" sz="1600" b="1" dirty="0">
-                <a:solidFill>
-                  <a:srgbClr val="06294A"/>
-                </a:solidFill>
-                <a:latin typeface="Calibri" pitchFamily="34" charset="0"/>
-                <a:ea typeface="Calibri" pitchFamily="34" charset="-122"/>
-                <a:cs typeface="Calibri" pitchFamily="34" charset="-120"/>
-              </a:rPr>
-              <a:t>4</a:t>
-            </a:r>
-            <a:endParaRPr lang="en-US" sz="1600" dirty="0"/>
-          </a:p>
-        </p:txBody>
-      </p:sp>
-      <p:sp>
-        <p:nvSpPr>
-          <p:cNvPr id="22" name="Text 20"/>
-          <p:cNvSpPr txBox="1"/>
-          <p:nvPr/>
-        </p:nvSpPr>
-        <p:spPr>
-          <a:xfrm>
-            <a:off x="9349511" y="2377440"/>
-            <a:ext cx="2019224" cy="731520"/>
-          </a:xfrm>
-          <a:prstGeom prst="rect">
-            <a:avLst/>
-          </a:prstGeom>
-          <a:noFill/>
-          <a:ln/>
-        </p:spPr>
-        <p:txBody>
-          <a:bodyPr wrap="square" lIns="0" tIns="0" rIns="0" bIns="0" rtlCol="0" anchor="t"/>
-          <a:lstStyle/>
-          <a:p>
-            <a:pPr indent="0" marL="0">
-              <a:buNone/>
-            </a:pPr>
-            <a:r>
-              <a:rPr lang="en-US" sz="1800" b="1" dirty="0">
-                <a:solidFill>
-                  <a:srgbClr val="003C6C"/>
-                </a:solidFill>
-                <a:latin typeface="Calibri" pitchFamily="34" charset="0"/>
-                <a:ea typeface="Calibri" pitchFamily="34" charset="-122"/>
-                <a:cs typeface="Calibri" pitchFamily="34" charset="-120"/>
-              </a:rPr>
-              <a:t>HPRC 2026</a:t>
-            </a:r>
-            <a:endParaRPr lang="en-US" sz="1800" dirty="0"/>
-          </a:p>
-        </p:txBody>
-      </p:sp>
-      <p:sp>
-        <p:nvSpPr>
-          <p:cNvPr id="23" name="Text 21"/>
-          <p:cNvSpPr txBox="1"/>
-          <p:nvPr/>
-        </p:nvSpPr>
-        <p:spPr>
-          <a:xfrm>
-            <a:off x="9349511" y="3108960"/>
-            <a:ext cx="2019224" cy="2377440"/>
-          </a:xfrm>
-          <a:prstGeom prst="rect">
-            <a:avLst/>
-          </a:prstGeom>
-          <a:noFill/>
-          <a:ln/>
-        </p:spPr>
-        <p:txBody>
-          <a:bodyPr wrap="square" lIns="0" tIns="0" rIns="0" bIns="0" rtlCol="0" anchor="t"/>
-          <a:lstStyle/>
-          <a:p>
-            <a:pPr indent="0" marL="0">
-              <a:buNone/>
-            </a:pPr>
-            <a:r>
-              <a:rPr lang="en-US" sz="1350" dirty="0">
-                <a:solidFill>
-                  <a:srgbClr val="18293B"/>
-                </a:solidFill>
-                <a:latin typeface="Calibri" pitchFamily="34" charset="0"/>
-                <a:ea typeface="Calibri" pitchFamily="34" charset="-122"/>
-                <a:cs typeface="Calibri" pitchFamily="34" charset="-120"/>
-              </a:rPr>
-              <a:t>Rehearse the talk; record a 20 s demo of convert -&gt; lifted annotations; print the poster.</a:t>
-            </a:r>
-            <a:endParaRPr lang="en-US" sz="1350" dirty="0"/>
-          </a:p>
-        </p:txBody>
-      </p:sp>
-      <p:sp>
-        <p:nvSpPr>
-          <p:cNvPr id="24" name="Text 22"/>
-          <p:cNvSpPr txBox="1"/>
-          <p:nvPr/>
-        </p:nvSpPr>
-        <p:spPr>
-          <a:xfrm>
-            <a:off x="548640" y="5943600"/>
-            <a:ext cx="11094415" cy="548640"/>
-          </a:xfrm>
-          <a:prstGeom prst="rect">
-            <a:avLst/>
-          </a:prstGeom>
-          <a:noFill/>
-          <a:ln/>
-        </p:spPr>
-        <p:txBody>
-          <a:bodyPr wrap="square" lIns="0" tIns="0" rIns="0" bIns="0" rtlCol="0" anchor="t"/>
-          <a:lstStyle/>
-          <a:p>
-            <a:pPr indent="0" marL="0">
-              <a:buNone/>
-            </a:pPr>
-            <a:r>
-              <a:rPr lang="en-US" sz="1300" i="1" dirty="0">
-                <a:solidFill>
-                  <a:srgbClr val="5B6B7C"/>
-                </a:solidFill>
-                <a:latin typeface="Calibri" pitchFamily="34" charset="0"/>
-                <a:ea typeface="Calibri" pitchFamily="34" charset="-122"/>
-                <a:cs typeface="Calibri" pitchFamily="34" charset="-120"/>
-              </a:rPr>
-              <a:t>Stretch: identity over query length (charges soft clips) as an option for the PSL track; single-traversal multi-target translation if the picker commonly asks for many targets.</a:t>
-            </a:r>
-            <a:endParaRPr lang="en-US" sz="1300" dirty="0"/>
           </a:p>
         </p:txBody>
       </p:sp>
